--- a/Presentazione_tesi_Guidi.pptx
+++ b/Presentazione_tesi_Guidi.pptx
@@ -617,35 +617,35 @@
           <a:p>
             <a:pPr lvl="0"/>
             <a:r>
-              <a:rPr lang="it-IT" noProof="0" smtClean="0"/>
+              <a:rPr lang="it-IT" noProof="0"/>
               <a:t>Fare clic per modificare gli stili del testo dello schema</a:t>
             </a:r>
           </a:p>
           <a:p>
             <a:pPr lvl="1"/>
             <a:r>
-              <a:rPr lang="it-IT" noProof="0" smtClean="0"/>
+              <a:rPr lang="it-IT" noProof="0"/>
               <a:t>Secondo livello</a:t>
             </a:r>
           </a:p>
           <a:p>
             <a:pPr lvl="2"/>
             <a:r>
-              <a:rPr lang="it-IT" noProof="0" smtClean="0"/>
+              <a:rPr lang="it-IT" noProof="0"/>
               <a:t>Terzo livello</a:t>
             </a:r>
           </a:p>
           <a:p>
             <a:pPr lvl="3"/>
             <a:r>
-              <a:rPr lang="it-IT" noProof="0" smtClean="0"/>
+              <a:rPr lang="it-IT" noProof="0"/>
               <a:t>Quarto livello</a:t>
             </a:r>
           </a:p>
           <a:p>
             <a:pPr lvl="4"/>
             <a:r>
-              <a:rPr lang="it-IT" noProof="0" smtClean="0"/>
+              <a:rPr lang="it-IT" noProof="0"/>
               <a:t>Quinto livello</a:t>
             </a:r>
           </a:p>
@@ -933,7 +933,7 @@
               <a:pPr defTabSz="989013"/>
               <a:t>1</a:t>
             </a:fld>
-            <a:endParaRPr lang="it-IT" smtClean="0"/>
+            <a:endParaRPr lang="it-IT"/>
           </a:p>
         </p:txBody>
       </p:sp>
@@ -1081,7 +1081,7 @@
 </file>
 
 <file path=ppt/notesSlides/notesSlide3.xml><?xml version="1.0" encoding="utf-8"?>
-<p:notes xmlns:a="http://schemas.openxmlformats.org/drawingml/2006/main" xmlns:p="http://schemas.openxmlformats.org/presentationml/2006/main" xmlns:r="http://schemas.openxmlformats.org/officeDocument/2006/relationships">
+<p:notes xmlns:a="http://schemas.openxmlformats.org/drawingml/2006/main" xmlns:r="http://schemas.openxmlformats.org/officeDocument/2006/relationships" xmlns:p="http://schemas.openxmlformats.org/presentationml/2006/main">
   <p:cSld>
     <p:spTree>
       <p:nvGrpSpPr>
@@ -1101,7 +1101,7 @@
         <p:nvSpPr>
           <p:cNvPr id="2" name="Slide Image Placeholder 1"/>
           <p:cNvSpPr>
-            <a:spLocks noGrp="1"/>
+            <a:spLocks noGrp="1" noRot="1" noChangeAspect="1"/>
           </p:cNvSpPr>
           <p:nvPr>
             <p:ph type="sldImg" idx="2"/>
@@ -1116,7 +1116,7 @@
             <a:spLocks noGrp="1"/>
           </p:cNvSpPr>
           <p:nvPr>
-            <p:ph type="body" idx="3" sz="quarter"/>
+            <p:ph type="body" sz="quarter" idx="3"/>
           </p:nvPr>
         </p:nvSpPr>
         <p:spPr/>
@@ -1137,7 +1137,7 @@
             <a:spLocks noGrp="1"/>
           </p:cNvSpPr>
           <p:nvPr>
-            <p:ph type="sldNum" idx="5" sz="quarter"/>
+            <p:ph type="sldNum" sz="quarter" idx="5"/>
           </p:nvPr>
         </p:nvSpPr>
         <p:spPr/>
@@ -1151,7 +1151,7 @@
 </file>
 
 <file path=ppt/notesSlides/notesSlide4.xml><?xml version="1.0" encoding="utf-8"?>
-<p:notes xmlns:a="http://schemas.openxmlformats.org/drawingml/2006/main" xmlns:p="http://schemas.openxmlformats.org/presentationml/2006/main" xmlns:r="http://schemas.openxmlformats.org/officeDocument/2006/relationships">
+<p:notes xmlns:a="http://schemas.openxmlformats.org/drawingml/2006/main" xmlns:r="http://schemas.openxmlformats.org/officeDocument/2006/relationships" xmlns:p="http://schemas.openxmlformats.org/presentationml/2006/main">
   <p:cSld>
     <p:spTree>
       <p:nvGrpSpPr>
@@ -1171,7 +1171,7 @@
         <p:nvSpPr>
           <p:cNvPr id="2" name="Slide Image Placeholder 1"/>
           <p:cNvSpPr>
-            <a:spLocks noGrp="1"/>
+            <a:spLocks noGrp="1" noRot="1" noChangeAspect="1"/>
           </p:cNvSpPr>
           <p:nvPr>
             <p:ph type="sldImg" idx="2"/>
@@ -1186,7 +1186,7 @@
             <a:spLocks noGrp="1"/>
           </p:cNvSpPr>
           <p:nvPr>
-            <p:ph type="body" idx="3" sz="quarter"/>
+            <p:ph type="body" sz="quarter" idx="3"/>
           </p:nvPr>
         </p:nvSpPr>
         <p:spPr/>
@@ -1207,7 +1207,7 @@
             <a:spLocks noGrp="1"/>
           </p:cNvSpPr>
           <p:nvPr>
-            <p:ph type="sldNum" idx="5" sz="quarter"/>
+            <p:ph type="sldNum" sz="quarter" idx="5"/>
           </p:nvPr>
         </p:nvSpPr>
         <p:spPr/>
@@ -1359,13 +1359,6 @@
   <p:clrMapOvr>
     <a:masterClrMapping/>
   </p:clrMapOvr>
-  <p:timing>
-    <p:tnLst>
-      <p:par>
-        <p:cTn id="1" dur="indefinite" restart="never" nodeType="tmRoot"/>
-      </p:par>
-    </p:tnLst>
-  </p:timing>
 </p:sldLayout>
 </file>
 
@@ -1402,10 +1395,9 @@
           <a:lstStyle/>
           <a:p>
             <a:r>
-              <a:rPr lang="it-IT" smtClean="0"/>
+              <a:rPr lang="it-IT"/>
               <a:t>Fare clic per modificare lo stile del titolo</a:t>
             </a:r>
-            <a:endParaRPr lang="it-IT"/>
           </a:p>
         </p:txBody>
       </p:sp>
@@ -1426,38 +1418,37 @@
           <a:p>
             <a:pPr lvl="0"/>
             <a:r>
-              <a:rPr lang="it-IT" smtClean="0"/>
+              <a:rPr lang="it-IT"/>
               <a:t>Fare clic per modificare stili del testo dello schema</a:t>
             </a:r>
           </a:p>
           <a:p>
             <a:pPr lvl="1"/>
             <a:r>
-              <a:rPr lang="it-IT" smtClean="0"/>
+              <a:rPr lang="it-IT"/>
               <a:t>Secondo livello</a:t>
             </a:r>
           </a:p>
           <a:p>
             <a:pPr lvl="2"/>
             <a:r>
-              <a:rPr lang="it-IT" smtClean="0"/>
+              <a:rPr lang="it-IT"/>
               <a:t>Terzo livello</a:t>
             </a:r>
           </a:p>
           <a:p>
             <a:pPr lvl="3"/>
             <a:r>
-              <a:rPr lang="it-IT" smtClean="0"/>
+              <a:rPr lang="it-IT"/>
               <a:t>Quarto livello</a:t>
             </a:r>
           </a:p>
           <a:p>
             <a:pPr lvl="4"/>
             <a:r>
-              <a:rPr lang="it-IT" smtClean="0"/>
+              <a:rPr lang="it-IT"/>
               <a:t>Quinto livello</a:t>
             </a:r>
-            <a:endParaRPr lang="it-IT"/>
           </a:p>
         </p:txBody>
       </p:sp>
@@ -1491,7 +1482,7 @@
           <a:p>
             <a:pPr algn="l"/>
             <a:r>
-              <a:rPr lang="en-US" sz="1100" i="1" dirty="0" smtClean="0">
+              <a:rPr lang="en-US" sz="1100" i="1" dirty="0">
                 <a:latin typeface="Calibri" panose="020F0502020204030204" pitchFamily="34" charset="0"/>
               </a:rPr>
               <a:t>IEEE 802.15.4e: a Building Block for the Internet of Things</a:t>
@@ -1519,13 +1510,6 @@
   <p:clrMapOvr>
     <a:masterClrMapping/>
   </p:clrMapOvr>
-  <p:timing>
-    <p:tnLst>
-      <p:par>
-        <p:cTn id="1" dur="indefinite" restart="never" nodeType="tmRoot"/>
-      </p:par>
-    </p:tnLst>
-  </p:timing>
 </p:sldLayout>
 </file>
 
@@ -1567,10 +1551,9 @@
           <a:lstStyle/>
           <a:p>
             <a:r>
-              <a:rPr lang="it-IT" smtClean="0"/>
+              <a:rPr lang="it-IT"/>
               <a:t>Fare clic per modificare lo stile del titolo</a:t>
             </a:r>
-            <a:endParaRPr lang="it-IT"/>
           </a:p>
         </p:txBody>
       </p:sp>
@@ -1596,38 +1579,37 @@
           <a:p>
             <a:pPr lvl="0"/>
             <a:r>
-              <a:rPr lang="it-IT" smtClean="0"/>
+              <a:rPr lang="it-IT"/>
               <a:t>Fare clic per modificare stili del testo dello schema</a:t>
             </a:r>
           </a:p>
           <a:p>
             <a:pPr lvl="1"/>
             <a:r>
-              <a:rPr lang="it-IT" smtClean="0"/>
+              <a:rPr lang="it-IT"/>
               <a:t>Secondo livello</a:t>
             </a:r>
           </a:p>
           <a:p>
             <a:pPr lvl="2"/>
             <a:r>
-              <a:rPr lang="it-IT" smtClean="0"/>
+              <a:rPr lang="it-IT"/>
               <a:t>Terzo livello</a:t>
             </a:r>
           </a:p>
           <a:p>
             <a:pPr lvl="3"/>
             <a:r>
-              <a:rPr lang="it-IT" smtClean="0"/>
+              <a:rPr lang="it-IT"/>
               <a:t>Quarto livello</a:t>
             </a:r>
           </a:p>
           <a:p>
             <a:pPr lvl="4"/>
             <a:r>
-              <a:rPr lang="it-IT" smtClean="0"/>
+              <a:rPr lang="it-IT"/>
               <a:t>Quinto livello</a:t>
             </a:r>
-            <a:endParaRPr lang="it-IT"/>
           </a:p>
         </p:txBody>
       </p:sp>
@@ -1661,7 +1643,7 @@
           <a:p>
             <a:pPr algn="l"/>
             <a:r>
-              <a:rPr lang="en-US" sz="1100" i="1" dirty="0" smtClean="0">
+              <a:rPr lang="en-US" sz="1100" i="1" dirty="0">
                 <a:latin typeface="Calibri" panose="020F0502020204030204" pitchFamily="34" charset="0"/>
               </a:rPr>
               <a:t>IEEE 802.15.4e: a Building Block for the Internet of Things</a:t>
@@ -1689,13 +1671,6 @@
   <p:clrMapOvr>
     <a:masterClrMapping/>
   </p:clrMapOvr>
-  <p:timing>
-    <p:tnLst>
-      <p:par>
-        <p:cTn id="1" dur="indefinite" restart="never" nodeType="tmRoot"/>
-      </p:par>
-    </p:tnLst>
-  </p:timing>
 </p:sldLayout>
 </file>
 
@@ -1737,10 +1712,9 @@
           <a:lstStyle/>
           <a:p>
             <a:r>
-              <a:rPr lang="it-IT" smtClean="0"/>
+              <a:rPr lang="it-IT"/>
               <a:t>Fare clic per modificare lo stile del titolo</a:t>
             </a:r>
-            <a:endParaRPr lang="it-IT"/>
           </a:p>
         </p:txBody>
       </p:sp>
@@ -1766,38 +1740,37 @@
           <a:p>
             <a:pPr lvl="0"/>
             <a:r>
-              <a:rPr lang="it-IT" smtClean="0"/>
+              <a:rPr lang="it-IT"/>
               <a:t>Fare clic per modificare stili del testo dello schema</a:t>
             </a:r>
           </a:p>
           <a:p>
             <a:pPr lvl="1"/>
             <a:r>
-              <a:rPr lang="it-IT" smtClean="0"/>
+              <a:rPr lang="it-IT"/>
               <a:t>Secondo livello</a:t>
             </a:r>
           </a:p>
           <a:p>
             <a:pPr lvl="2"/>
             <a:r>
-              <a:rPr lang="it-IT" smtClean="0"/>
+              <a:rPr lang="it-IT"/>
               <a:t>Terzo livello</a:t>
             </a:r>
           </a:p>
           <a:p>
             <a:pPr lvl="3"/>
             <a:r>
-              <a:rPr lang="it-IT" smtClean="0"/>
+              <a:rPr lang="it-IT"/>
               <a:t>Quarto livello</a:t>
             </a:r>
           </a:p>
           <a:p>
             <a:pPr lvl="4"/>
             <a:r>
-              <a:rPr lang="it-IT" smtClean="0"/>
+              <a:rPr lang="it-IT"/>
               <a:t>Quinto livello</a:t>
             </a:r>
-            <a:endParaRPr lang="it-IT"/>
           </a:p>
         </p:txBody>
       </p:sp>
@@ -1823,38 +1796,37 @@
           <a:p>
             <a:pPr lvl="0"/>
             <a:r>
-              <a:rPr lang="it-IT" smtClean="0"/>
+              <a:rPr lang="it-IT"/>
               <a:t>Fare clic per modificare stili del testo dello schema</a:t>
             </a:r>
           </a:p>
           <a:p>
             <a:pPr lvl="1"/>
             <a:r>
-              <a:rPr lang="it-IT" smtClean="0"/>
+              <a:rPr lang="it-IT"/>
               <a:t>Secondo livello</a:t>
             </a:r>
           </a:p>
           <a:p>
             <a:pPr lvl="2"/>
             <a:r>
-              <a:rPr lang="it-IT" smtClean="0"/>
+              <a:rPr lang="it-IT"/>
               <a:t>Terzo livello</a:t>
             </a:r>
           </a:p>
           <a:p>
             <a:pPr lvl="3"/>
             <a:r>
-              <a:rPr lang="it-IT" smtClean="0"/>
+              <a:rPr lang="it-IT"/>
               <a:t>Quarto livello</a:t>
             </a:r>
           </a:p>
           <a:p>
             <a:pPr lvl="4"/>
             <a:r>
-              <a:rPr lang="it-IT" smtClean="0"/>
+              <a:rPr lang="it-IT"/>
               <a:t>Quinto livello</a:t>
             </a:r>
-            <a:endParaRPr lang="it-IT"/>
           </a:p>
         </p:txBody>
       </p:sp>
@@ -1863,13 +1835,6 @@
   <p:clrMapOvr>
     <a:masterClrMapping/>
   </p:clrMapOvr>
-  <p:timing>
-    <p:tnLst>
-      <p:par>
-        <p:cTn id="1" dur="indefinite" restart="never" nodeType="tmRoot"/>
-      </p:par>
-    </p:tnLst>
-  </p:timing>
 </p:sldLayout>
 </file>
 
@@ -1911,10 +1876,9 @@
           <a:lstStyle/>
           <a:p>
             <a:r>
-              <a:rPr lang="it-IT" smtClean="0"/>
+              <a:rPr lang="it-IT"/>
               <a:t>Fare clic per modificare lo stile del titolo</a:t>
             </a:r>
-            <a:endParaRPr lang="it-IT"/>
           </a:p>
         </p:txBody>
       </p:sp>
@@ -1940,38 +1904,37 @@
           <a:p>
             <a:pPr lvl="0"/>
             <a:r>
-              <a:rPr lang="it-IT" smtClean="0"/>
+              <a:rPr lang="it-IT"/>
               <a:t>Fare clic per modificare stili del testo dello schema</a:t>
             </a:r>
           </a:p>
           <a:p>
             <a:pPr lvl="1"/>
             <a:r>
-              <a:rPr lang="it-IT" smtClean="0"/>
+              <a:rPr lang="it-IT"/>
               <a:t>Secondo livello</a:t>
             </a:r>
           </a:p>
           <a:p>
             <a:pPr lvl="2"/>
             <a:r>
-              <a:rPr lang="it-IT" smtClean="0"/>
+              <a:rPr lang="it-IT"/>
               <a:t>Terzo livello</a:t>
             </a:r>
           </a:p>
           <a:p>
             <a:pPr lvl="3"/>
             <a:r>
-              <a:rPr lang="it-IT" smtClean="0"/>
+              <a:rPr lang="it-IT"/>
               <a:t>Quarto livello</a:t>
             </a:r>
           </a:p>
           <a:p>
             <a:pPr lvl="4"/>
             <a:r>
-              <a:rPr lang="it-IT" smtClean="0"/>
+              <a:rPr lang="it-IT"/>
               <a:t>Quinto livello</a:t>
             </a:r>
-            <a:endParaRPr lang="it-IT"/>
           </a:p>
         </p:txBody>
       </p:sp>
@@ -1997,38 +1960,37 @@
           <a:p>
             <a:pPr lvl="0"/>
             <a:r>
-              <a:rPr lang="it-IT" smtClean="0"/>
+              <a:rPr lang="it-IT"/>
               <a:t>Fare clic per modificare stili del testo dello schema</a:t>
             </a:r>
           </a:p>
           <a:p>
             <a:pPr lvl="1"/>
             <a:r>
-              <a:rPr lang="it-IT" smtClean="0"/>
+              <a:rPr lang="it-IT"/>
               <a:t>Secondo livello</a:t>
             </a:r>
           </a:p>
           <a:p>
             <a:pPr lvl="2"/>
             <a:r>
-              <a:rPr lang="it-IT" smtClean="0"/>
+              <a:rPr lang="it-IT"/>
               <a:t>Terzo livello</a:t>
             </a:r>
           </a:p>
           <a:p>
             <a:pPr lvl="3"/>
             <a:r>
-              <a:rPr lang="it-IT" smtClean="0"/>
+              <a:rPr lang="it-IT"/>
               <a:t>Quarto livello</a:t>
             </a:r>
           </a:p>
           <a:p>
             <a:pPr lvl="4"/>
             <a:r>
-              <a:rPr lang="it-IT" smtClean="0"/>
+              <a:rPr lang="it-IT"/>
               <a:t>Quinto livello</a:t>
             </a:r>
-            <a:endParaRPr lang="it-IT"/>
           </a:p>
         </p:txBody>
       </p:sp>
@@ -2062,7 +2024,7 @@
           <a:p>
             <a:pPr algn="l"/>
             <a:r>
-              <a:rPr lang="en-US" sz="1100" i="1" dirty="0" smtClean="0">
+              <a:rPr lang="en-US" sz="1100" i="1" dirty="0">
                 <a:latin typeface="Calibri" panose="020F0502020204030204" pitchFamily="34" charset="0"/>
               </a:rPr>
               <a:t>IEEE 802.15.4e: a Building Block for the Internet of Things</a:t>
@@ -2090,13 +2052,6 @@
   <p:clrMapOvr>
     <a:masterClrMapping/>
   </p:clrMapOvr>
-  <p:timing>
-    <p:tnLst>
-      <p:par>
-        <p:cTn id="1" dur="indefinite" restart="never" nodeType="tmRoot"/>
-      </p:par>
-    </p:tnLst>
-  </p:timing>
 </p:sldLayout>
 </file>
 
@@ -2138,10 +2093,9 @@
           <a:lstStyle/>
           <a:p>
             <a:r>
-              <a:rPr lang="it-IT" smtClean="0"/>
+              <a:rPr lang="it-IT"/>
               <a:t>Fare clic per modificare lo stile del titolo</a:t>
             </a:r>
-            <a:endParaRPr lang="it-IT"/>
           </a:p>
         </p:txBody>
       </p:sp>
@@ -2167,38 +2121,37 @@
           <a:p>
             <a:pPr lvl="0"/>
             <a:r>
-              <a:rPr lang="it-IT" smtClean="0"/>
+              <a:rPr lang="it-IT"/>
               <a:t>Fare clic per modificare stili del testo dello schema</a:t>
             </a:r>
           </a:p>
           <a:p>
             <a:pPr lvl="1"/>
             <a:r>
-              <a:rPr lang="it-IT" smtClean="0"/>
+              <a:rPr lang="it-IT"/>
               <a:t>Secondo livello</a:t>
             </a:r>
           </a:p>
           <a:p>
             <a:pPr lvl="2"/>
             <a:r>
-              <a:rPr lang="it-IT" smtClean="0"/>
+              <a:rPr lang="it-IT"/>
               <a:t>Terzo livello</a:t>
             </a:r>
           </a:p>
           <a:p>
             <a:pPr lvl="3"/>
             <a:r>
-              <a:rPr lang="it-IT" smtClean="0"/>
+              <a:rPr lang="it-IT"/>
               <a:t>Quarto livello</a:t>
             </a:r>
           </a:p>
           <a:p>
             <a:pPr lvl="4"/>
             <a:r>
-              <a:rPr lang="it-IT" smtClean="0"/>
+              <a:rPr lang="it-IT"/>
               <a:t>Quinto livello</a:t>
             </a:r>
-            <a:endParaRPr lang="it-IT"/>
           </a:p>
         </p:txBody>
       </p:sp>
@@ -2224,38 +2177,37 @@
           <a:p>
             <a:pPr lvl="0"/>
             <a:r>
-              <a:rPr lang="it-IT" smtClean="0"/>
+              <a:rPr lang="it-IT"/>
               <a:t>Fare clic per modificare stili del testo dello schema</a:t>
             </a:r>
           </a:p>
           <a:p>
             <a:pPr lvl="1"/>
             <a:r>
-              <a:rPr lang="it-IT" smtClean="0"/>
+              <a:rPr lang="it-IT"/>
               <a:t>Secondo livello</a:t>
             </a:r>
           </a:p>
           <a:p>
             <a:pPr lvl="2"/>
             <a:r>
-              <a:rPr lang="it-IT" smtClean="0"/>
+              <a:rPr lang="it-IT"/>
               <a:t>Terzo livello</a:t>
             </a:r>
           </a:p>
           <a:p>
             <a:pPr lvl="3"/>
             <a:r>
-              <a:rPr lang="it-IT" smtClean="0"/>
+              <a:rPr lang="it-IT"/>
               <a:t>Quarto livello</a:t>
             </a:r>
           </a:p>
           <a:p>
             <a:pPr lvl="4"/>
             <a:r>
-              <a:rPr lang="it-IT" smtClean="0"/>
+              <a:rPr lang="it-IT"/>
               <a:t>Quinto livello</a:t>
             </a:r>
-            <a:endParaRPr lang="it-IT"/>
           </a:p>
         </p:txBody>
       </p:sp>
@@ -2289,7 +2241,7 @@
           <a:p>
             <a:pPr algn="l"/>
             <a:r>
-              <a:rPr lang="en-US" sz="1100" i="1" dirty="0" smtClean="0">
+              <a:rPr lang="en-US" sz="1100" i="1" dirty="0">
                 <a:latin typeface="Calibri" panose="020F0502020204030204" pitchFamily="34" charset="0"/>
               </a:rPr>
               <a:t>IEEE 802.15.4e: a Building Block for the Internet of Things</a:t>
@@ -2317,13 +2269,6 @@
   <p:clrMapOvr>
     <a:masterClrMapping/>
   </p:clrMapOvr>
-  <p:timing>
-    <p:tnLst>
-      <p:par>
-        <p:cTn id="1" dur="indefinite" restart="never" nodeType="tmRoot"/>
-      </p:par>
-    </p:tnLst>
-  </p:timing>
 </p:sldLayout>
 </file>
 
@@ -2365,10 +2310,9 @@
           <a:lstStyle/>
           <a:p>
             <a:r>
-              <a:rPr lang="it-IT" smtClean="0"/>
+              <a:rPr lang="it-IT"/>
               <a:t>Fare clic per modificare lo stile del titolo</a:t>
             </a:r>
-            <a:endParaRPr lang="it-IT"/>
           </a:p>
         </p:txBody>
       </p:sp>
@@ -2394,38 +2338,37 @@
           <a:p>
             <a:pPr lvl="0"/>
             <a:r>
-              <a:rPr lang="it-IT" smtClean="0"/>
+              <a:rPr lang="it-IT"/>
               <a:t>Fare clic per modificare stili del testo dello schema</a:t>
             </a:r>
           </a:p>
           <a:p>
             <a:pPr lvl="1"/>
             <a:r>
-              <a:rPr lang="it-IT" smtClean="0"/>
+              <a:rPr lang="it-IT"/>
               <a:t>Secondo livello</a:t>
             </a:r>
           </a:p>
           <a:p>
             <a:pPr lvl="2"/>
             <a:r>
-              <a:rPr lang="it-IT" smtClean="0"/>
+              <a:rPr lang="it-IT"/>
               <a:t>Terzo livello</a:t>
             </a:r>
           </a:p>
           <a:p>
             <a:pPr lvl="3"/>
             <a:r>
-              <a:rPr lang="it-IT" smtClean="0"/>
+              <a:rPr lang="it-IT"/>
               <a:t>Quarto livello</a:t>
             </a:r>
           </a:p>
           <a:p>
             <a:pPr lvl="4"/>
             <a:r>
-              <a:rPr lang="it-IT" smtClean="0"/>
+              <a:rPr lang="it-IT"/>
               <a:t>Quinto livello</a:t>
             </a:r>
-            <a:endParaRPr lang="it-IT"/>
           </a:p>
         </p:txBody>
       </p:sp>
@@ -2450,7 +2393,7 @@
           <a:lstStyle/>
           <a:p>
             <a:pPr lvl="0"/>
-            <a:endParaRPr lang="it-IT" noProof="0" smtClean="0"/>
+            <a:endParaRPr lang="it-IT" noProof="0"/>
           </a:p>
         </p:txBody>
       </p:sp>
@@ -2484,7 +2427,7 @@
           <a:p>
             <a:pPr algn="l"/>
             <a:r>
-              <a:rPr lang="en-US" sz="1100" i="1" dirty="0" smtClean="0">
+              <a:rPr lang="en-US" sz="1100" i="1" dirty="0">
                 <a:latin typeface="Calibri" panose="020F0502020204030204" pitchFamily="34" charset="0"/>
               </a:rPr>
               <a:t>IEEE 802.15.4e: a Building Block for the Internet of Things</a:t>
@@ -2512,13 +2455,6 @@
   <p:clrMapOvr>
     <a:masterClrMapping/>
   </p:clrMapOvr>
-  <p:timing>
-    <p:tnLst>
-      <p:par>
-        <p:cTn id="1" dur="indefinite" restart="never" nodeType="tmRoot"/>
-      </p:par>
-    </p:tnLst>
-  </p:timing>
 </p:sldLayout>
 </file>
 
@@ -2560,10 +2496,9 @@
           <a:lstStyle/>
           <a:p>
             <a:r>
-              <a:rPr lang="it-IT" smtClean="0"/>
+              <a:rPr lang="it-IT"/>
               <a:t>Fare clic per modificare lo stile del titolo</a:t>
             </a:r>
-            <a:endParaRPr lang="it-IT"/>
           </a:p>
         </p:txBody>
       </p:sp>
@@ -2589,38 +2524,37 @@
           <a:p>
             <a:pPr lvl="0"/>
             <a:r>
-              <a:rPr lang="it-IT" smtClean="0"/>
+              <a:rPr lang="it-IT"/>
               <a:t>Fare clic per modificare stili del testo dello schema</a:t>
             </a:r>
           </a:p>
           <a:p>
             <a:pPr lvl="1"/>
             <a:r>
-              <a:rPr lang="it-IT" smtClean="0"/>
+              <a:rPr lang="it-IT"/>
               <a:t>Secondo livello</a:t>
             </a:r>
           </a:p>
           <a:p>
             <a:pPr lvl="2"/>
             <a:r>
-              <a:rPr lang="it-IT" smtClean="0"/>
+              <a:rPr lang="it-IT"/>
               <a:t>Terzo livello</a:t>
             </a:r>
           </a:p>
           <a:p>
             <a:pPr lvl="3"/>
             <a:r>
-              <a:rPr lang="it-IT" smtClean="0"/>
+              <a:rPr lang="it-IT"/>
               <a:t>Quarto livello</a:t>
             </a:r>
           </a:p>
           <a:p>
             <a:pPr lvl="4"/>
             <a:r>
-              <a:rPr lang="it-IT" smtClean="0"/>
+              <a:rPr lang="it-IT"/>
               <a:t>Quinto livello</a:t>
             </a:r>
-            <a:endParaRPr lang="it-IT"/>
           </a:p>
         </p:txBody>
       </p:sp>
@@ -2646,38 +2580,37 @@
           <a:p>
             <a:pPr lvl="0"/>
             <a:r>
-              <a:rPr lang="it-IT" smtClean="0"/>
+              <a:rPr lang="it-IT"/>
               <a:t>Fare clic per modificare stili del testo dello schema</a:t>
             </a:r>
           </a:p>
           <a:p>
             <a:pPr lvl="1"/>
             <a:r>
-              <a:rPr lang="it-IT" smtClean="0"/>
+              <a:rPr lang="it-IT"/>
               <a:t>Secondo livello</a:t>
             </a:r>
           </a:p>
           <a:p>
             <a:pPr lvl="2"/>
             <a:r>
-              <a:rPr lang="it-IT" smtClean="0"/>
+              <a:rPr lang="it-IT"/>
               <a:t>Terzo livello</a:t>
             </a:r>
           </a:p>
           <a:p>
             <a:pPr lvl="3"/>
             <a:r>
-              <a:rPr lang="it-IT" smtClean="0"/>
+              <a:rPr lang="it-IT"/>
               <a:t>Quarto livello</a:t>
             </a:r>
           </a:p>
           <a:p>
             <a:pPr lvl="4"/>
             <a:r>
-              <a:rPr lang="it-IT" smtClean="0"/>
+              <a:rPr lang="it-IT"/>
               <a:t>Quinto livello</a:t>
             </a:r>
-            <a:endParaRPr lang="it-IT"/>
           </a:p>
         </p:txBody>
       </p:sp>
@@ -2703,38 +2636,37 @@
           <a:p>
             <a:pPr lvl="0"/>
             <a:r>
-              <a:rPr lang="it-IT" smtClean="0"/>
+              <a:rPr lang="it-IT"/>
               <a:t>Fare clic per modificare stili del testo dello schema</a:t>
             </a:r>
           </a:p>
           <a:p>
             <a:pPr lvl="1"/>
             <a:r>
-              <a:rPr lang="it-IT" smtClean="0"/>
+              <a:rPr lang="it-IT"/>
               <a:t>Secondo livello</a:t>
             </a:r>
           </a:p>
           <a:p>
             <a:pPr lvl="2"/>
             <a:r>
-              <a:rPr lang="it-IT" smtClean="0"/>
+              <a:rPr lang="it-IT"/>
               <a:t>Terzo livello</a:t>
             </a:r>
           </a:p>
           <a:p>
             <a:pPr lvl="3"/>
             <a:r>
-              <a:rPr lang="it-IT" smtClean="0"/>
+              <a:rPr lang="it-IT"/>
               <a:t>Quarto livello</a:t>
             </a:r>
           </a:p>
           <a:p>
             <a:pPr lvl="4"/>
             <a:r>
-              <a:rPr lang="it-IT" smtClean="0"/>
+              <a:rPr lang="it-IT"/>
               <a:t>Quinto livello</a:t>
             </a:r>
-            <a:endParaRPr lang="it-IT"/>
           </a:p>
         </p:txBody>
       </p:sp>
@@ -2768,7 +2700,7 @@
           <a:p>
             <a:pPr algn="l"/>
             <a:r>
-              <a:rPr lang="en-US" sz="1100" i="1" dirty="0" smtClean="0">
+              <a:rPr lang="en-US" sz="1100" i="1" dirty="0">
                 <a:latin typeface="Calibri" panose="020F0502020204030204" pitchFamily="34" charset="0"/>
               </a:rPr>
               <a:t>IEEE 802.15.4e: a Building Block for the Internet of Things</a:t>
@@ -2796,13 +2728,6 @@
   <p:clrMapOvr>
     <a:masterClrMapping/>
   </p:clrMapOvr>
-  <p:timing>
-    <p:tnLst>
-      <p:par>
-        <p:cTn id="1" dur="indefinite" restart="never" nodeType="tmRoot"/>
-      </p:par>
-    </p:tnLst>
-  </p:timing>
 </p:sldLayout>
 </file>
 
@@ -2844,10 +2769,9 @@
           <a:lstStyle/>
           <a:p>
             <a:r>
-              <a:rPr lang="it-IT" smtClean="0"/>
+              <a:rPr lang="it-IT"/>
               <a:t>Fare clic per modificare lo stile del titolo</a:t>
             </a:r>
-            <a:endParaRPr lang="it-IT"/>
           </a:p>
         </p:txBody>
       </p:sp>
@@ -2872,7 +2796,7 @@
           <a:lstStyle/>
           <a:p>
             <a:pPr lvl="0"/>
-            <a:endParaRPr lang="it-IT" noProof="0" smtClean="0"/>
+            <a:endParaRPr lang="it-IT" noProof="0"/>
           </a:p>
         </p:txBody>
       </p:sp>
@@ -2906,7 +2830,7 @@
           <a:p>
             <a:pPr algn="l"/>
             <a:r>
-              <a:rPr lang="en-US" sz="1100" i="1" dirty="0" smtClean="0">
+              <a:rPr lang="en-US" sz="1100" i="1" dirty="0">
                 <a:latin typeface="Calibri" panose="020F0502020204030204" pitchFamily="34" charset="0"/>
               </a:rPr>
               <a:t>IEEE 802.15.4e: a Building Block for the Internet of Things</a:t>
@@ -2934,13 +2858,6 @@
   <p:clrMapOvr>
     <a:masterClrMapping/>
   </p:clrMapOvr>
-  <p:timing>
-    <p:tnLst>
-      <p:par>
-        <p:cTn id="1" dur="indefinite" restart="never" nodeType="tmRoot"/>
-      </p:par>
-    </p:tnLst>
-  </p:timing>
 </p:sldLayout>
 </file>
 
@@ -2982,10 +2899,9 @@
           <a:lstStyle/>
           <a:p>
             <a:r>
-              <a:rPr lang="it-IT" smtClean="0"/>
+              <a:rPr lang="it-IT"/>
               <a:t>Fare clic per modificare lo stile del titolo</a:t>
             </a:r>
-            <a:endParaRPr lang="it-IT"/>
           </a:p>
         </p:txBody>
       </p:sp>
@@ -3011,38 +2927,37 @@
           <a:p>
             <a:pPr lvl="0"/>
             <a:r>
-              <a:rPr lang="it-IT" smtClean="0"/>
+              <a:rPr lang="it-IT"/>
               <a:t>Fare clic per modificare stili del testo dello schema</a:t>
             </a:r>
           </a:p>
           <a:p>
             <a:pPr lvl="1"/>
             <a:r>
-              <a:rPr lang="it-IT" smtClean="0"/>
+              <a:rPr lang="it-IT"/>
               <a:t>Secondo livello</a:t>
             </a:r>
           </a:p>
           <a:p>
             <a:pPr lvl="2"/>
             <a:r>
-              <a:rPr lang="it-IT" smtClean="0"/>
+              <a:rPr lang="it-IT"/>
               <a:t>Terzo livello</a:t>
             </a:r>
           </a:p>
           <a:p>
             <a:pPr lvl="3"/>
             <a:r>
-              <a:rPr lang="it-IT" smtClean="0"/>
+              <a:rPr lang="it-IT"/>
               <a:t>Quarto livello</a:t>
             </a:r>
           </a:p>
           <a:p>
             <a:pPr lvl="4"/>
             <a:r>
-              <a:rPr lang="it-IT" smtClean="0"/>
+              <a:rPr lang="it-IT"/>
               <a:t>Quinto livello</a:t>
             </a:r>
-            <a:endParaRPr lang="it-IT"/>
           </a:p>
         </p:txBody>
       </p:sp>
@@ -3068,38 +2983,37 @@
           <a:p>
             <a:pPr lvl="0"/>
             <a:r>
-              <a:rPr lang="it-IT" smtClean="0"/>
+              <a:rPr lang="it-IT"/>
               <a:t>Fare clic per modificare stili del testo dello schema</a:t>
             </a:r>
           </a:p>
           <a:p>
             <a:pPr lvl="1"/>
             <a:r>
-              <a:rPr lang="it-IT" smtClean="0"/>
+              <a:rPr lang="it-IT"/>
               <a:t>Secondo livello</a:t>
             </a:r>
           </a:p>
           <a:p>
             <a:pPr lvl="2"/>
             <a:r>
-              <a:rPr lang="it-IT" smtClean="0"/>
+              <a:rPr lang="it-IT"/>
               <a:t>Terzo livello</a:t>
             </a:r>
           </a:p>
           <a:p>
             <a:pPr lvl="3"/>
             <a:r>
-              <a:rPr lang="it-IT" smtClean="0"/>
+              <a:rPr lang="it-IT"/>
               <a:t>Quarto livello</a:t>
             </a:r>
           </a:p>
           <a:p>
             <a:pPr lvl="4"/>
             <a:r>
-              <a:rPr lang="it-IT" smtClean="0"/>
+              <a:rPr lang="it-IT"/>
               <a:t>Quinto livello</a:t>
             </a:r>
-            <a:endParaRPr lang="it-IT"/>
           </a:p>
         </p:txBody>
       </p:sp>
@@ -3125,38 +3039,37 @@
           <a:p>
             <a:pPr lvl="0"/>
             <a:r>
-              <a:rPr lang="it-IT" smtClean="0"/>
+              <a:rPr lang="it-IT"/>
               <a:t>Fare clic per modificare stili del testo dello schema</a:t>
             </a:r>
           </a:p>
           <a:p>
             <a:pPr lvl="1"/>
             <a:r>
-              <a:rPr lang="it-IT" smtClean="0"/>
+              <a:rPr lang="it-IT"/>
               <a:t>Secondo livello</a:t>
             </a:r>
           </a:p>
           <a:p>
             <a:pPr lvl="2"/>
             <a:r>
-              <a:rPr lang="it-IT" smtClean="0"/>
+              <a:rPr lang="it-IT"/>
               <a:t>Terzo livello</a:t>
             </a:r>
           </a:p>
           <a:p>
             <a:pPr lvl="3"/>
             <a:r>
-              <a:rPr lang="it-IT" smtClean="0"/>
+              <a:rPr lang="it-IT"/>
               <a:t>Quarto livello</a:t>
             </a:r>
           </a:p>
           <a:p>
             <a:pPr lvl="4"/>
             <a:r>
-              <a:rPr lang="it-IT" smtClean="0"/>
+              <a:rPr lang="it-IT"/>
               <a:t>Quinto livello</a:t>
             </a:r>
-            <a:endParaRPr lang="it-IT"/>
           </a:p>
         </p:txBody>
       </p:sp>
@@ -3182,38 +3095,37 @@
           <a:p>
             <a:pPr lvl="0"/>
             <a:r>
-              <a:rPr lang="it-IT" smtClean="0"/>
+              <a:rPr lang="it-IT"/>
               <a:t>Fare clic per modificare stili del testo dello schema</a:t>
             </a:r>
           </a:p>
           <a:p>
             <a:pPr lvl="1"/>
             <a:r>
-              <a:rPr lang="it-IT" smtClean="0"/>
+              <a:rPr lang="it-IT"/>
               <a:t>Secondo livello</a:t>
             </a:r>
           </a:p>
           <a:p>
             <a:pPr lvl="2"/>
             <a:r>
-              <a:rPr lang="it-IT" smtClean="0"/>
+              <a:rPr lang="it-IT"/>
               <a:t>Terzo livello</a:t>
             </a:r>
           </a:p>
           <a:p>
             <a:pPr lvl="3"/>
             <a:r>
-              <a:rPr lang="it-IT" smtClean="0"/>
+              <a:rPr lang="it-IT"/>
               <a:t>Quarto livello</a:t>
             </a:r>
           </a:p>
           <a:p>
             <a:pPr lvl="4"/>
             <a:r>
-              <a:rPr lang="it-IT" smtClean="0"/>
+              <a:rPr lang="it-IT"/>
               <a:t>Quinto livello</a:t>
             </a:r>
-            <a:endParaRPr lang="it-IT"/>
           </a:p>
         </p:txBody>
       </p:sp>
@@ -3247,7 +3159,7 @@
           <a:p>
             <a:pPr algn="l"/>
             <a:r>
-              <a:rPr lang="en-US" sz="1100" i="1" dirty="0" smtClean="0">
+              <a:rPr lang="en-US" sz="1100" i="1" dirty="0">
                 <a:latin typeface="Calibri" panose="020F0502020204030204" pitchFamily="34" charset="0"/>
               </a:rPr>
               <a:t>IEEE 802.15.4e: a Building Block for the Internet of Things</a:t>
@@ -3275,13 +3187,6 @@
   <p:clrMapOvr>
     <a:masterClrMapping/>
   </p:clrMapOvr>
-  <p:timing>
-    <p:tnLst>
-      <p:par>
-        <p:cTn id="1" dur="indefinite" restart="never" nodeType="tmRoot"/>
-      </p:par>
-    </p:tnLst>
-  </p:timing>
 </p:sldLayout>
 </file>
 
@@ -3556,10 +3461,9 @@
           <a:lstStyle/>
           <a:p>
             <a:r>
-              <a:rPr lang="it-IT" smtClean="0"/>
+              <a:rPr lang="it-IT"/>
               <a:t>Fare clic per modificare lo stile del titolo</a:t>
             </a:r>
-            <a:endParaRPr lang="it-IT"/>
           </a:p>
         </p:txBody>
       </p:sp>
@@ -3606,38 +3510,37 @@
           <a:p>
             <a:pPr lvl="0"/>
             <a:r>
-              <a:rPr lang="it-IT" dirty="0" smtClean="0"/>
+              <a:rPr lang="it-IT" dirty="0"/>
               <a:t>Fare clic per modificare stili del testo dello schema</a:t>
             </a:r>
           </a:p>
           <a:p>
             <a:pPr lvl="1"/>
             <a:r>
-              <a:rPr lang="it-IT" dirty="0" smtClean="0"/>
+              <a:rPr lang="it-IT" dirty="0"/>
               <a:t>Secondo livello</a:t>
             </a:r>
           </a:p>
           <a:p>
             <a:pPr lvl="2"/>
             <a:r>
-              <a:rPr lang="it-IT" dirty="0" smtClean="0"/>
+              <a:rPr lang="it-IT" dirty="0"/>
               <a:t>Terzo livello</a:t>
             </a:r>
           </a:p>
           <a:p>
             <a:pPr lvl="3"/>
             <a:r>
-              <a:rPr lang="it-IT" dirty="0" smtClean="0"/>
+              <a:rPr lang="it-IT" dirty="0"/>
               <a:t>Quarto livello</a:t>
             </a:r>
           </a:p>
           <a:p>
             <a:pPr lvl="4"/>
             <a:r>
-              <a:rPr lang="it-IT" dirty="0" smtClean="0"/>
+              <a:rPr lang="it-IT" dirty="0"/>
               <a:t>Quinto livello</a:t>
             </a:r>
-            <a:endParaRPr lang="it-IT" dirty="0"/>
           </a:p>
         </p:txBody>
       </p:sp>
@@ -3723,7 +3626,7 @@
               <a:buNone/>
               <a:tabLst/>
             </a:pPr>
-            <a:endParaRPr kumimoji="0" lang="it-IT" sz="4000" b="0" i="0" u="none" strike="noStrike" cap="none" normalizeH="0" baseline="0" smtClean="0">
+            <a:endParaRPr kumimoji="0" lang="it-IT" sz="4000" b="0" i="0" u="none" strike="noStrike" cap="none" normalizeH="0" baseline="0">
               <a:ln>
                 <a:noFill/>
               </a:ln>
@@ -3741,13 +3644,6 @@
   <p:clrMapOvr>
     <a:masterClrMapping/>
   </p:clrMapOvr>
-  <p:timing>
-    <p:tnLst>
-      <p:par>
-        <p:cTn id="1" dur="indefinite" restart="never" nodeType="tmRoot"/>
-      </p:par>
-    </p:tnLst>
-  </p:timing>
 </p:sldLayout>
 </file>
 
@@ -3784,10 +3680,9 @@
           <a:lstStyle/>
           <a:p>
             <a:r>
-              <a:rPr lang="it-IT" smtClean="0"/>
+              <a:rPr lang="it-IT"/>
               <a:t>Fare clic per modificare lo stile del titolo</a:t>
             </a:r>
-            <a:endParaRPr lang="it-IT"/>
           </a:p>
         </p:txBody>
       </p:sp>
@@ -3808,38 +3703,37 @@
           <a:p>
             <a:pPr lvl="0"/>
             <a:r>
-              <a:rPr lang="it-IT" smtClean="0"/>
+              <a:rPr lang="it-IT"/>
               <a:t>Fare clic per modificare stili del testo dello schema</a:t>
             </a:r>
           </a:p>
           <a:p>
             <a:pPr lvl="1"/>
             <a:r>
-              <a:rPr lang="it-IT" smtClean="0"/>
+              <a:rPr lang="it-IT"/>
               <a:t>Secondo livello</a:t>
             </a:r>
           </a:p>
           <a:p>
             <a:pPr lvl="2"/>
             <a:r>
-              <a:rPr lang="it-IT" smtClean="0"/>
+              <a:rPr lang="it-IT"/>
               <a:t>Terzo livello</a:t>
             </a:r>
           </a:p>
           <a:p>
             <a:pPr lvl="3"/>
             <a:r>
-              <a:rPr lang="it-IT" smtClean="0"/>
+              <a:rPr lang="it-IT"/>
               <a:t>Quarto livello</a:t>
             </a:r>
           </a:p>
           <a:p>
             <a:pPr lvl="4"/>
             <a:r>
-              <a:rPr lang="it-IT" smtClean="0"/>
+              <a:rPr lang="it-IT"/>
               <a:t>Quinto livello</a:t>
             </a:r>
-            <a:endParaRPr lang="it-IT"/>
           </a:p>
         </p:txBody>
       </p:sp>
@@ -3893,10 +3787,9 @@
           </a:lstStyle>
           <a:p>
             <a:r>
-              <a:rPr lang="it-IT" smtClean="0"/>
+              <a:rPr lang="it-IT"/>
               <a:t>Fare clic per modificare lo stile del titolo</a:t>
             </a:r>
-            <a:endParaRPr lang="it-IT"/>
           </a:p>
         </p:txBody>
       </p:sp>
@@ -3959,7 +3852,7 @@
           <a:p>
             <a:pPr lvl="0"/>
             <a:r>
-              <a:rPr lang="it-IT" smtClean="0"/>
+              <a:rPr lang="it-IT"/>
               <a:t>Fare clic per modificare stili del testo dello schema</a:t>
             </a:r>
           </a:p>
@@ -4006,10 +3899,9 @@
           <a:lstStyle/>
           <a:p>
             <a:r>
-              <a:rPr lang="it-IT" smtClean="0"/>
+              <a:rPr lang="it-IT"/>
               <a:t>Fare clic per modificare lo stile del titolo</a:t>
             </a:r>
-            <a:endParaRPr lang="it-IT"/>
           </a:p>
         </p:txBody>
       </p:sp>
@@ -4063,38 +3955,37 @@
           <a:p>
             <a:pPr lvl="0"/>
             <a:r>
-              <a:rPr lang="it-IT" smtClean="0"/>
+              <a:rPr lang="it-IT"/>
               <a:t>Fare clic per modificare stili del testo dello schema</a:t>
             </a:r>
           </a:p>
           <a:p>
             <a:pPr lvl="1"/>
             <a:r>
-              <a:rPr lang="it-IT" smtClean="0"/>
+              <a:rPr lang="it-IT"/>
               <a:t>Secondo livello</a:t>
             </a:r>
           </a:p>
           <a:p>
             <a:pPr lvl="2"/>
             <a:r>
-              <a:rPr lang="it-IT" smtClean="0"/>
+              <a:rPr lang="it-IT"/>
               <a:t>Terzo livello</a:t>
             </a:r>
           </a:p>
           <a:p>
             <a:pPr lvl="3"/>
             <a:r>
-              <a:rPr lang="it-IT" smtClean="0"/>
+              <a:rPr lang="it-IT"/>
               <a:t>Quarto livello</a:t>
             </a:r>
           </a:p>
           <a:p>
             <a:pPr lvl="4"/>
             <a:r>
-              <a:rPr lang="it-IT" smtClean="0"/>
+              <a:rPr lang="it-IT"/>
               <a:t>Quinto livello</a:t>
             </a:r>
-            <a:endParaRPr lang="it-IT"/>
           </a:p>
         </p:txBody>
       </p:sp>
@@ -4148,38 +4039,37 @@
           <a:p>
             <a:pPr lvl="0"/>
             <a:r>
-              <a:rPr lang="it-IT" smtClean="0"/>
+              <a:rPr lang="it-IT"/>
               <a:t>Fare clic per modificare stili del testo dello schema</a:t>
             </a:r>
           </a:p>
           <a:p>
             <a:pPr lvl="1"/>
             <a:r>
-              <a:rPr lang="it-IT" smtClean="0"/>
+              <a:rPr lang="it-IT"/>
               <a:t>Secondo livello</a:t>
             </a:r>
           </a:p>
           <a:p>
             <a:pPr lvl="2"/>
             <a:r>
-              <a:rPr lang="it-IT" smtClean="0"/>
+              <a:rPr lang="it-IT"/>
               <a:t>Terzo livello</a:t>
             </a:r>
           </a:p>
           <a:p>
             <a:pPr lvl="3"/>
             <a:r>
-              <a:rPr lang="it-IT" smtClean="0"/>
+              <a:rPr lang="it-IT"/>
               <a:t>Quarto livello</a:t>
             </a:r>
           </a:p>
           <a:p>
             <a:pPr lvl="4"/>
             <a:r>
-              <a:rPr lang="it-IT" smtClean="0"/>
+              <a:rPr lang="it-IT"/>
               <a:t>Quinto livello</a:t>
             </a:r>
-            <a:endParaRPr lang="it-IT"/>
           </a:p>
         </p:txBody>
       </p:sp>
@@ -4228,10 +4118,9 @@
           </a:lstStyle>
           <a:p>
             <a:r>
-              <a:rPr lang="it-IT" smtClean="0"/>
+              <a:rPr lang="it-IT"/>
               <a:t>Fare clic per modificare lo stile del titolo</a:t>
             </a:r>
-            <a:endParaRPr lang="it-IT"/>
           </a:p>
         </p:txBody>
       </p:sp>
@@ -4294,7 +4183,7 @@
           <a:p>
             <a:pPr lvl="0"/>
             <a:r>
-              <a:rPr lang="it-IT" smtClean="0"/>
+              <a:rPr lang="it-IT"/>
               <a:t>Fare clic per modificare stili del testo dello schema</a:t>
             </a:r>
           </a:p>
@@ -4350,38 +4239,37 @@
           <a:p>
             <a:pPr lvl="0"/>
             <a:r>
-              <a:rPr lang="it-IT" smtClean="0"/>
+              <a:rPr lang="it-IT"/>
               <a:t>Fare clic per modificare stili del testo dello schema</a:t>
             </a:r>
           </a:p>
           <a:p>
             <a:pPr lvl="1"/>
             <a:r>
-              <a:rPr lang="it-IT" smtClean="0"/>
+              <a:rPr lang="it-IT"/>
               <a:t>Secondo livello</a:t>
             </a:r>
           </a:p>
           <a:p>
             <a:pPr lvl="2"/>
             <a:r>
-              <a:rPr lang="it-IT" smtClean="0"/>
+              <a:rPr lang="it-IT"/>
               <a:t>Terzo livello</a:t>
             </a:r>
           </a:p>
           <a:p>
             <a:pPr lvl="3"/>
             <a:r>
-              <a:rPr lang="it-IT" smtClean="0"/>
+              <a:rPr lang="it-IT"/>
               <a:t>Quarto livello</a:t>
             </a:r>
           </a:p>
           <a:p>
             <a:pPr lvl="4"/>
             <a:r>
-              <a:rPr lang="it-IT" smtClean="0"/>
+              <a:rPr lang="it-IT"/>
               <a:t>Quinto livello</a:t>
             </a:r>
-            <a:endParaRPr lang="it-IT"/>
           </a:p>
         </p:txBody>
       </p:sp>
@@ -4444,7 +4332,7 @@
           <a:p>
             <a:pPr lvl="0"/>
             <a:r>
-              <a:rPr lang="it-IT" smtClean="0"/>
+              <a:rPr lang="it-IT"/>
               <a:t>Fare clic per modificare stili del testo dello schema</a:t>
             </a:r>
           </a:p>
@@ -4500,38 +4388,37 @@
           <a:p>
             <a:pPr lvl="0"/>
             <a:r>
-              <a:rPr lang="it-IT" smtClean="0"/>
+              <a:rPr lang="it-IT"/>
               <a:t>Fare clic per modificare stili del testo dello schema</a:t>
             </a:r>
           </a:p>
           <a:p>
             <a:pPr lvl="1"/>
             <a:r>
-              <a:rPr lang="it-IT" smtClean="0"/>
+              <a:rPr lang="it-IT"/>
               <a:t>Secondo livello</a:t>
             </a:r>
           </a:p>
           <a:p>
             <a:pPr lvl="2"/>
             <a:r>
-              <a:rPr lang="it-IT" smtClean="0"/>
+              <a:rPr lang="it-IT"/>
               <a:t>Terzo livello</a:t>
             </a:r>
           </a:p>
           <a:p>
             <a:pPr lvl="3"/>
             <a:r>
-              <a:rPr lang="it-IT" smtClean="0"/>
+              <a:rPr lang="it-IT"/>
               <a:t>Quarto livello</a:t>
             </a:r>
           </a:p>
           <a:p>
             <a:pPr lvl="4"/>
             <a:r>
-              <a:rPr lang="it-IT" smtClean="0"/>
+              <a:rPr lang="it-IT"/>
               <a:t>Quinto livello</a:t>
             </a:r>
-            <a:endParaRPr lang="it-IT"/>
           </a:p>
         </p:txBody>
       </p:sp>
@@ -4576,10 +4463,9 @@
           <a:lstStyle/>
           <a:p>
             <a:r>
-              <a:rPr lang="it-IT" smtClean="0"/>
+              <a:rPr lang="it-IT"/>
               <a:t>Fare clic per modificare lo stile del titolo</a:t>
             </a:r>
-            <a:endParaRPr lang="it-IT"/>
           </a:p>
         </p:txBody>
       </p:sp>
@@ -4658,10 +4544,9 @@
           </a:lstStyle>
           <a:p>
             <a:r>
-              <a:rPr lang="it-IT" smtClean="0"/>
+              <a:rPr lang="it-IT"/>
               <a:t>Fare clic per modificare lo stile del titolo</a:t>
             </a:r>
-            <a:endParaRPr lang="it-IT"/>
           </a:p>
         </p:txBody>
       </p:sp>
@@ -4715,38 +4600,37 @@
           <a:p>
             <a:pPr lvl="0"/>
             <a:r>
-              <a:rPr lang="it-IT" smtClean="0"/>
+              <a:rPr lang="it-IT"/>
               <a:t>Fare clic per modificare stili del testo dello schema</a:t>
             </a:r>
           </a:p>
           <a:p>
             <a:pPr lvl="1"/>
             <a:r>
-              <a:rPr lang="it-IT" smtClean="0"/>
+              <a:rPr lang="it-IT"/>
               <a:t>Secondo livello</a:t>
             </a:r>
           </a:p>
           <a:p>
             <a:pPr lvl="2"/>
             <a:r>
-              <a:rPr lang="it-IT" smtClean="0"/>
+              <a:rPr lang="it-IT"/>
               <a:t>Terzo livello</a:t>
             </a:r>
           </a:p>
           <a:p>
             <a:pPr lvl="3"/>
             <a:r>
-              <a:rPr lang="it-IT" smtClean="0"/>
+              <a:rPr lang="it-IT"/>
               <a:t>Quarto livello</a:t>
             </a:r>
           </a:p>
           <a:p>
             <a:pPr lvl="4"/>
             <a:r>
-              <a:rPr lang="it-IT" smtClean="0"/>
+              <a:rPr lang="it-IT"/>
               <a:t>Quinto livello</a:t>
             </a:r>
-            <a:endParaRPr lang="it-IT"/>
           </a:p>
         </p:txBody>
       </p:sp>
@@ -4809,7 +4693,7 @@
           <a:p>
             <a:pPr lvl="0"/>
             <a:r>
-              <a:rPr lang="it-IT" smtClean="0"/>
+              <a:rPr lang="it-IT"/>
               <a:t>Fare clic per modificare stili del testo dello schema</a:t>
             </a:r>
           </a:p>
@@ -4865,10 +4749,9 @@
           </a:lstStyle>
           <a:p>
             <a:r>
-              <a:rPr lang="it-IT" smtClean="0"/>
+              <a:rPr lang="it-IT"/>
               <a:t>Fare clic per modificare lo stile del titolo</a:t>
             </a:r>
-            <a:endParaRPr lang="it-IT"/>
           </a:p>
         </p:txBody>
       </p:sp>
@@ -4930,7 +4813,7 @@
           </a:lstStyle>
           <a:p>
             <a:pPr lvl="0"/>
-            <a:endParaRPr lang="it-IT" noProof="0" smtClean="0"/>
+            <a:endParaRPr lang="it-IT" noProof="0"/>
           </a:p>
         </p:txBody>
       </p:sp>
@@ -4993,7 +4876,7 @@
           <a:p>
             <a:pPr lvl="0"/>
             <a:r>
-              <a:rPr lang="it-IT" smtClean="0"/>
+              <a:rPr lang="it-IT"/>
               <a:t>Fare clic per modificare stili del testo dello schema</a:t>
             </a:r>
           </a:p>
@@ -5040,10 +4923,9 @@
           <a:lstStyle/>
           <a:p>
             <a:r>
-              <a:rPr lang="it-IT" smtClean="0"/>
+              <a:rPr lang="it-IT"/>
               <a:t>Fare clic per modificare lo stile del titolo</a:t>
             </a:r>
-            <a:endParaRPr lang="it-IT"/>
           </a:p>
         </p:txBody>
       </p:sp>
@@ -5064,38 +4946,37 @@
           <a:p>
             <a:pPr lvl="0"/>
             <a:r>
-              <a:rPr lang="it-IT" smtClean="0"/>
+              <a:rPr lang="it-IT"/>
               <a:t>Fare clic per modificare stili del testo dello schema</a:t>
             </a:r>
           </a:p>
           <a:p>
             <a:pPr lvl="1"/>
             <a:r>
-              <a:rPr lang="it-IT" smtClean="0"/>
+              <a:rPr lang="it-IT"/>
               <a:t>Secondo livello</a:t>
             </a:r>
           </a:p>
           <a:p>
             <a:pPr lvl="2"/>
             <a:r>
-              <a:rPr lang="it-IT" smtClean="0"/>
+              <a:rPr lang="it-IT"/>
               <a:t>Terzo livello</a:t>
             </a:r>
           </a:p>
           <a:p>
             <a:pPr lvl="3"/>
             <a:r>
-              <a:rPr lang="it-IT" smtClean="0"/>
+              <a:rPr lang="it-IT"/>
               <a:t>Quarto livello</a:t>
             </a:r>
           </a:p>
           <a:p>
             <a:pPr lvl="4"/>
             <a:r>
-              <a:rPr lang="it-IT" smtClean="0"/>
+              <a:rPr lang="it-IT"/>
               <a:t>Quinto livello</a:t>
             </a:r>
-            <a:endParaRPr lang="it-IT"/>
           </a:p>
         </p:txBody>
       </p:sp>
@@ -5145,10 +5026,9 @@
           <a:lstStyle/>
           <a:p>
             <a:r>
-              <a:rPr lang="it-IT" smtClean="0"/>
+              <a:rPr lang="it-IT"/>
               <a:t>Fare clic per modificare lo stile del titolo</a:t>
             </a:r>
-            <a:endParaRPr lang="it-IT"/>
           </a:p>
         </p:txBody>
       </p:sp>
@@ -5174,38 +5054,37 @@
           <a:p>
             <a:pPr lvl="0"/>
             <a:r>
-              <a:rPr lang="it-IT" smtClean="0"/>
+              <a:rPr lang="it-IT"/>
               <a:t>Fare clic per modificare stili del testo dello schema</a:t>
             </a:r>
           </a:p>
           <a:p>
             <a:pPr lvl="1"/>
             <a:r>
-              <a:rPr lang="it-IT" smtClean="0"/>
+              <a:rPr lang="it-IT"/>
               <a:t>Secondo livello</a:t>
             </a:r>
           </a:p>
           <a:p>
             <a:pPr lvl="2"/>
             <a:r>
-              <a:rPr lang="it-IT" smtClean="0"/>
+              <a:rPr lang="it-IT"/>
               <a:t>Terzo livello</a:t>
             </a:r>
           </a:p>
           <a:p>
             <a:pPr lvl="3"/>
             <a:r>
-              <a:rPr lang="it-IT" smtClean="0"/>
+              <a:rPr lang="it-IT"/>
               <a:t>Quarto livello</a:t>
             </a:r>
           </a:p>
           <a:p>
             <a:pPr lvl="4"/>
             <a:r>
-              <a:rPr lang="it-IT" smtClean="0"/>
+              <a:rPr lang="it-IT"/>
               <a:t>Quinto livello</a:t>
             </a:r>
-            <a:endParaRPr lang="it-IT"/>
           </a:p>
         </p:txBody>
       </p:sp>
@@ -5259,10 +5138,9 @@
           </a:lstStyle>
           <a:p>
             <a:r>
-              <a:rPr lang="it-IT" smtClean="0"/>
+              <a:rPr lang="it-IT"/>
               <a:t>Fare clic per modificare lo stile del titolo</a:t>
             </a:r>
-            <a:endParaRPr lang="it-IT"/>
           </a:p>
         </p:txBody>
       </p:sp>
@@ -5325,7 +5203,7 @@
           <a:p>
             <a:pPr lvl="0"/>
             <a:r>
-              <a:rPr lang="it-IT" smtClean="0"/>
+              <a:rPr lang="it-IT"/>
               <a:t>Fare clic per modificare stili del testo dello schema</a:t>
             </a:r>
           </a:p>
@@ -5361,7 +5239,7 @@
           <a:p>
             <a:pPr algn="l"/>
             <a:r>
-              <a:rPr lang="en-US" sz="1100" i="1" dirty="0" smtClean="0">
+              <a:rPr lang="en-US" sz="1100" i="1" dirty="0">
                 <a:latin typeface="Calibri" panose="020F0502020204030204" pitchFamily="34" charset="0"/>
               </a:rPr>
               <a:t>IEEE 802.15.4e: a Building Block for the Internet of Things</a:t>
@@ -5389,13 +5267,6 @@
   <p:clrMapOvr>
     <a:masterClrMapping/>
   </p:clrMapOvr>
-  <p:timing>
-    <p:tnLst>
-      <p:par>
-        <p:cTn id="1" dur="indefinite" restart="never" nodeType="tmRoot"/>
-      </p:par>
-    </p:tnLst>
-  </p:timing>
 </p:sldLayout>
 </file>
 
@@ -5472,10 +5343,9 @@
           <a:lstStyle/>
           <a:p>
             <a:r>
-              <a:rPr lang="it-IT" smtClean="0"/>
+              <a:rPr lang="it-IT"/>
               <a:t>Fare clic per modificare lo stile del titolo</a:t>
             </a:r>
-            <a:endParaRPr lang="it-IT"/>
           </a:p>
         </p:txBody>
       </p:sp>
@@ -5529,38 +5399,37 @@
           <a:p>
             <a:pPr lvl="0"/>
             <a:r>
-              <a:rPr lang="it-IT" smtClean="0"/>
+              <a:rPr lang="it-IT"/>
               <a:t>Fare clic per modificare stili del testo dello schema</a:t>
             </a:r>
           </a:p>
           <a:p>
             <a:pPr lvl="1"/>
             <a:r>
-              <a:rPr lang="it-IT" smtClean="0"/>
+              <a:rPr lang="it-IT"/>
               <a:t>Secondo livello</a:t>
             </a:r>
           </a:p>
           <a:p>
             <a:pPr lvl="2"/>
             <a:r>
-              <a:rPr lang="it-IT" smtClean="0"/>
+              <a:rPr lang="it-IT"/>
               <a:t>Terzo livello</a:t>
             </a:r>
           </a:p>
           <a:p>
             <a:pPr lvl="3"/>
             <a:r>
-              <a:rPr lang="it-IT" smtClean="0"/>
+              <a:rPr lang="it-IT"/>
               <a:t>Quarto livello</a:t>
             </a:r>
           </a:p>
           <a:p>
             <a:pPr lvl="4"/>
             <a:r>
-              <a:rPr lang="it-IT" smtClean="0"/>
+              <a:rPr lang="it-IT"/>
               <a:t>Quinto livello</a:t>
             </a:r>
-            <a:endParaRPr lang="it-IT"/>
           </a:p>
         </p:txBody>
       </p:sp>
@@ -5614,38 +5483,37 @@
           <a:p>
             <a:pPr lvl="0"/>
             <a:r>
-              <a:rPr lang="it-IT" smtClean="0"/>
+              <a:rPr lang="it-IT"/>
               <a:t>Fare clic per modificare stili del testo dello schema</a:t>
             </a:r>
           </a:p>
           <a:p>
             <a:pPr lvl="1"/>
             <a:r>
-              <a:rPr lang="it-IT" smtClean="0"/>
+              <a:rPr lang="it-IT"/>
               <a:t>Secondo livello</a:t>
             </a:r>
           </a:p>
           <a:p>
             <a:pPr lvl="2"/>
             <a:r>
-              <a:rPr lang="it-IT" smtClean="0"/>
+              <a:rPr lang="it-IT"/>
               <a:t>Terzo livello</a:t>
             </a:r>
           </a:p>
           <a:p>
             <a:pPr lvl="3"/>
             <a:r>
-              <a:rPr lang="it-IT" smtClean="0"/>
+              <a:rPr lang="it-IT"/>
               <a:t>Quarto livello</a:t>
             </a:r>
           </a:p>
           <a:p>
             <a:pPr lvl="4"/>
             <a:r>
-              <a:rPr lang="it-IT" smtClean="0"/>
+              <a:rPr lang="it-IT"/>
               <a:t>Quinto livello</a:t>
             </a:r>
-            <a:endParaRPr lang="it-IT"/>
           </a:p>
         </p:txBody>
       </p:sp>
@@ -5709,7 +5577,7 @@
           <a:p>
             <a:pPr algn="l"/>
             <a:r>
-              <a:rPr lang="en-US" sz="1100" i="1" dirty="0" smtClean="0">
+              <a:rPr lang="en-US" sz="1100" i="1" dirty="0">
                 <a:latin typeface="Calibri" panose="020F0502020204030204" pitchFamily="34" charset="0"/>
               </a:rPr>
               <a:t>IEEE 802.15.4e: a Building Block for the Internet of Things </a:t>
@@ -5737,13 +5605,6 @@
   <p:clrMapOvr>
     <a:masterClrMapping/>
   </p:clrMapOvr>
-  <p:timing>
-    <p:tnLst>
-      <p:par>
-        <p:cTn id="1" dur="indefinite" restart="never" nodeType="tmRoot"/>
-      </p:par>
-    </p:tnLst>
-  </p:timing>
 </p:sldLayout>
 </file>
 
@@ -5789,10 +5650,9 @@
           </a:lstStyle>
           <a:p>
             <a:r>
-              <a:rPr lang="it-IT" smtClean="0"/>
+              <a:rPr lang="it-IT"/>
               <a:t>Fare clic per modificare lo stile del titolo</a:t>
             </a:r>
-            <a:endParaRPr lang="it-IT"/>
           </a:p>
         </p:txBody>
       </p:sp>
@@ -5855,7 +5715,7 @@
           <a:p>
             <a:pPr lvl="0"/>
             <a:r>
-              <a:rPr lang="it-IT" smtClean="0"/>
+              <a:rPr lang="it-IT"/>
               <a:t>Fare clic per modificare stili del testo dello schema</a:t>
             </a:r>
           </a:p>
@@ -5911,38 +5771,37 @@
           <a:p>
             <a:pPr lvl="0"/>
             <a:r>
-              <a:rPr lang="it-IT" smtClean="0"/>
+              <a:rPr lang="it-IT"/>
               <a:t>Fare clic per modificare stili del testo dello schema</a:t>
             </a:r>
           </a:p>
           <a:p>
             <a:pPr lvl="1"/>
             <a:r>
-              <a:rPr lang="it-IT" smtClean="0"/>
+              <a:rPr lang="it-IT"/>
               <a:t>Secondo livello</a:t>
             </a:r>
           </a:p>
           <a:p>
             <a:pPr lvl="2"/>
             <a:r>
-              <a:rPr lang="it-IT" smtClean="0"/>
+              <a:rPr lang="it-IT"/>
               <a:t>Terzo livello</a:t>
             </a:r>
           </a:p>
           <a:p>
             <a:pPr lvl="3"/>
             <a:r>
-              <a:rPr lang="it-IT" smtClean="0"/>
+              <a:rPr lang="it-IT"/>
               <a:t>Quarto livello</a:t>
             </a:r>
           </a:p>
           <a:p>
             <a:pPr lvl="4"/>
             <a:r>
-              <a:rPr lang="it-IT" smtClean="0"/>
+              <a:rPr lang="it-IT"/>
               <a:t>Quinto livello</a:t>
             </a:r>
-            <a:endParaRPr lang="it-IT"/>
           </a:p>
         </p:txBody>
       </p:sp>
@@ -6005,7 +5864,7 @@
           <a:p>
             <a:pPr lvl="0"/>
             <a:r>
-              <a:rPr lang="it-IT" smtClean="0"/>
+              <a:rPr lang="it-IT"/>
               <a:t>Fare clic per modificare stili del testo dello schema</a:t>
             </a:r>
           </a:p>
@@ -6061,38 +5920,37 @@
           <a:p>
             <a:pPr lvl="0"/>
             <a:r>
-              <a:rPr lang="it-IT" smtClean="0"/>
+              <a:rPr lang="it-IT"/>
               <a:t>Fare clic per modificare stili del testo dello schema</a:t>
             </a:r>
           </a:p>
           <a:p>
             <a:pPr lvl="1"/>
             <a:r>
-              <a:rPr lang="it-IT" smtClean="0"/>
+              <a:rPr lang="it-IT"/>
               <a:t>Secondo livello</a:t>
             </a:r>
           </a:p>
           <a:p>
             <a:pPr lvl="2"/>
             <a:r>
-              <a:rPr lang="it-IT" smtClean="0"/>
+              <a:rPr lang="it-IT"/>
               <a:t>Terzo livello</a:t>
             </a:r>
           </a:p>
           <a:p>
             <a:pPr lvl="3"/>
             <a:r>
-              <a:rPr lang="it-IT" smtClean="0"/>
+              <a:rPr lang="it-IT"/>
               <a:t>Quarto livello</a:t>
             </a:r>
           </a:p>
           <a:p>
             <a:pPr lvl="4"/>
             <a:r>
-              <a:rPr lang="it-IT" smtClean="0"/>
+              <a:rPr lang="it-IT"/>
               <a:t>Quinto livello</a:t>
             </a:r>
-            <a:endParaRPr lang="it-IT"/>
           </a:p>
         </p:txBody>
       </p:sp>
@@ -6156,7 +6014,7 @@
           <a:p>
             <a:pPr algn="l"/>
             <a:r>
-              <a:rPr lang="en-US" sz="1100" i="1" dirty="0" smtClean="0">
+              <a:rPr lang="en-US" sz="1100" i="1" dirty="0">
                 <a:latin typeface="Calibri" panose="020F0502020204030204" pitchFamily="34" charset="0"/>
               </a:rPr>
               <a:t>IEEE 802.15.4e: a Building Block for the Internet of Things </a:t>
@@ -6184,13 +6042,6 @@
   <p:clrMapOvr>
     <a:masterClrMapping/>
   </p:clrMapOvr>
-  <p:timing>
-    <p:tnLst>
-      <p:par>
-        <p:cTn id="1" dur="indefinite" restart="never" nodeType="tmRoot"/>
-      </p:par>
-    </p:tnLst>
-  </p:timing>
 </p:sldLayout>
 </file>
 
@@ -6267,10 +6118,9 @@
           <a:lstStyle/>
           <a:p>
             <a:r>
-              <a:rPr lang="it-IT" smtClean="0"/>
+              <a:rPr lang="it-IT"/>
               <a:t>Fare clic per modificare lo stile del titolo</a:t>
             </a:r>
-            <a:endParaRPr lang="it-IT"/>
           </a:p>
         </p:txBody>
       </p:sp>
@@ -6364,7 +6214,7 @@
           <a:p>
             <a:pPr algn="l"/>
             <a:r>
-              <a:rPr lang="en-US" sz="1100" i="1" dirty="0" smtClean="0">
+              <a:rPr lang="en-US" sz="1100" i="1" dirty="0">
                 <a:latin typeface="Calibri" panose="020F0502020204030204" pitchFamily="34" charset="0"/>
               </a:rPr>
               <a:t>IEEE 802.15.4e: a Building Block for the Internet of Things </a:t>
@@ -6392,13 +6242,6 @@
   <p:clrMapOvr>
     <a:masterClrMapping/>
   </p:clrMapOvr>
-  <p:timing>
-    <p:tnLst>
-      <p:par>
-        <p:cTn id="1" dur="indefinite" restart="never" nodeType="tmRoot"/>
-      </p:par>
-    </p:tnLst>
-  </p:timing>
 </p:sldLayout>
 </file>
 
@@ -6479,7 +6322,7 @@
           <a:p>
             <a:pPr algn="l"/>
             <a:r>
-              <a:rPr lang="en-US" sz="1100" i="1" dirty="0" smtClean="0">
+              <a:rPr lang="en-US" sz="1100" i="1" dirty="0">
                 <a:latin typeface="Calibri" panose="020F0502020204030204" pitchFamily="34" charset="0"/>
               </a:rPr>
               <a:t>IEEE 802.15.4e: a Building Block for the Internet of Things </a:t>
@@ -6507,13 +6350,6 @@
   <p:clrMapOvr>
     <a:masterClrMapping/>
   </p:clrMapOvr>
-  <p:timing>
-    <p:tnLst>
-      <p:par>
-        <p:cTn id="1" dur="indefinite" restart="never" nodeType="tmRoot"/>
-      </p:par>
-    </p:tnLst>
-  </p:timing>
 </p:sldLayout>
 </file>
 
@@ -6559,10 +6395,9 @@
           </a:lstStyle>
           <a:p>
             <a:r>
-              <a:rPr lang="it-IT" smtClean="0"/>
+              <a:rPr lang="it-IT"/>
               <a:t>Fare clic per modificare lo stile del titolo</a:t>
             </a:r>
-            <a:endParaRPr lang="it-IT"/>
           </a:p>
         </p:txBody>
       </p:sp>
@@ -6616,38 +6451,37 @@
           <a:p>
             <a:pPr lvl="0"/>
             <a:r>
-              <a:rPr lang="it-IT" smtClean="0"/>
+              <a:rPr lang="it-IT"/>
               <a:t>Fare clic per modificare stili del testo dello schema</a:t>
             </a:r>
           </a:p>
           <a:p>
             <a:pPr lvl="1"/>
             <a:r>
-              <a:rPr lang="it-IT" smtClean="0"/>
+              <a:rPr lang="it-IT"/>
               <a:t>Secondo livello</a:t>
             </a:r>
           </a:p>
           <a:p>
             <a:pPr lvl="2"/>
             <a:r>
-              <a:rPr lang="it-IT" smtClean="0"/>
+              <a:rPr lang="it-IT"/>
               <a:t>Terzo livello</a:t>
             </a:r>
           </a:p>
           <a:p>
             <a:pPr lvl="3"/>
             <a:r>
-              <a:rPr lang="it-IT" smtClean="0"/>
+              <a:rPr lang="it-IT"/>
               <a:t>Quarto livello</a:t>
             </a:r>
           </a:p>
           <a:p>
             <a:pPr lvl="4"/>
             <a:r>
-              <a:rPr lang="it-IT" smtClean="0"/>
+              <a:rPr lang="it-IT"/>
               <a:t>Quinto livello</a:t>
             </a:r>
-            <a:endParaRPr lang="it-IT"/>
           </a:p>
         </p:txBody>
       </p:sp>
@@ -6710,7 +6544,7 @@
           <a:p>
             <a:pPr lvl="0"/>
             <a:r>
-              <a:rPr lang="it-IT" smtClean="0"/>
+              <a:rPr lang="it-IT"/>
               <a:t>Fare clic per modificare stili del testo dello schema</a:t>
             </a:r>
           </a:p>
@@ -6776,7 +6610,7 @@
           <a:p>
             <a:pPr algn="l"/>
             <a:r>
-              <a:rPr lang="en-US" sz="1100" i="1" dirty="0" smtClean="0">
+              <a:rPr lang="en-US" sz="1100" i="1" dirty="0">
                 <a:latin typeface="Calibri" panose="020F0502020204030204" pitchFamily="34" charset="0"/>
               </a:rPr>
               <a:t>IEEE 802.15.4e: a Building Block for the Internet of Things </a:t>
@@ -6804,13 +6638,6 @@
   <p:clrMapOvr>
     <a:masterClrMapping/>
   </p:clrMapOvr>
-  <p:timing>
-    <p:tnLst>
-      <p:par>
-        <p:cTn id="1" dur="indefinite" restart="never" nodeType="tmRoot"/>
-      </p:par>
-    </p:tnLst>
-  </p:timing>
 </p:sldLayout>
 </file>
 
@@ -6856,10 +6683,9 @@
           </a:lstStyle>
           <a:p>
             <a:r>
-              <a:rPr lang="it-IT" smtClean="0"/>
+              <a:rPr lang="it-IT"/>
               <a:t>Fare clic per modificare lo stile del titolo</a:t>
             </a:r>
-            <a:endParaRPr lang="it-IT"/>
           </a:p>
         </p:txBody>
       </p:sp>
@@ -6921,7 +6747,7 @@
           </a:lstStyle>
           <a:p>
             <a:pPr lvl="0"/>
-            <a:endParaRPr lang="it-IT" noProof="0" smtClean="0"/>
+            <a:endParaRPr lang="it-IT" noProof="0"/>
           </a:p>
         </p:txBody>
       </p:sp>
@@ -6984,7 +6810,7 @@
           <a:p>
             <a:pPr lvl="0"/>
             <a:r>
-              <a:rPr lang="it-IT" smtClean="0"/>
+              <a:rPr lang="it-IT"/>
               <a:t>Fare clic per modificare stili del testo dello schema</a:t>
             </a:r>
           </a:p>
@@ -7192,35 +7018,35 @@
           <a:p>
             <a:pPr lvl="0"/>
             <a:r>
-              <a:rPr lang="it-IT" smtClean="0"/>
+              <a:rPr lang="it-IT"/>
               <a:t>Fare clic per modificare gli stili del testo dello schema</a:t>
             </a:r>
           </a:p>
           <a:p>
             <a:pPr lvl="1"/>
             <a:r>
-              <a:rPr lang="it-IT" smtClean="0"/>
+              <a:rPr lang="it-IT"/>
               <a:t>Secondo livello</a:t>
             </a:r>
           </a:p>
           <a:p>
             <a:pPr lvl="2"/>
             <a:r>
-              <a:rPr lang="it-IT" smtClean="0"/>
+              <a:rPr lang="it-IT"/>
               <a:t>Terzo livello</a:t>
             </a:r>
           </a:p>
           <a:p>
             <a:pPr lvl="3"/>
             <a:r>
-              <a:rPr lang="it-IT" smtClean="0"/>
+              <a:rPr lang="it-IT"/>
               <a:t>Quarto livello</a:t>
             </a:r>
           </a:p>
           <a:p>
             <a:pPr lvl="4"/>
             <a:r>
-              <a:rPr lang="it-IT" smtClean="0"/>
+              <a:rPr lang="it-IT"/>
               <a:t>Quinto livello</a:t>
             </a:r>
           </a:p>
@@ -7262,7 +7088,7 @@
           <a:p>
             <a:pPr lvl="0"/>
             <a:r>
-              <a:rPr lang="en-US" smtClean="0"/>
+              <a:rPr lang="en-US"/>
               <a:t>Fare clic per modificare lo stile del titolo</a:t>
             </a:r>
           </a:p>
@@ -7490,13 +7316,6 @@
     <p:sldLayoutId id="2147484743" r:id="rId17"/>
     <p:sldLayoutId id="2147484744" r:id="rId18"/>
   </p:sldLayoutIdLst>
-  <p:timing>
-    <p:tnLst>
-      <p:par>
-        <p:cTn id="1" dur="indefinite" restart="never" nodeType="tmRoot"/>
-      </p:par>
-    </p:tnLst>
-  </p:timing>
   <p:hf hdr="0" dt="0"/>
   <p:txStyles>
     <p:titleStyle>
@@ -7974,7 +7793,7 @@
           <a:p>
             <a:pPr lvl="0"/>
             <a:r>
-              <a:rPr lang="it-IT" smtClean="0"/>
+              <a:rPr lang="it-IT"/>
               <a:t>Sommario</a:t>
             </a:r>
           </a:p>
@@ -8016,35 +7835,35 @@
           <a:p>
             <a:pPr lvl="0"/>
             <a:r>
-              <a:rPr lang="it-IT" smtClean="0"/>
+              <a:rPr lang="it-IT"/>
               <a:t>Fare clic per modificare gli stili del testo dello schema</a:t>
             </a:r>
           </a:p>
           <a:p>
             <a:pPr lvl="1"/>
             <a:r>
-              <a:rPr lang="it-IT" smtClean="0"/>
+              <a:rPr lang="it-IT"/>
               <a:t>Secondo livello</a:t>
             </a:r>
           </a:p>
           <a:p>
             <a:pPr lvl="2"/>
             <a:r>
-              <a:rPr lang="it-IT" smtClean="0"/>
+              <a:rPr lang="it-IT"/>
               <a:t>Terzo livello</a:t>
             </a:r>
           </a:p>
           <a:p>
             <a:pPr lvl="3"/>
             <a:r>
-              <a:rPr lang="it-IT" smtClean="0"/>
+              <a:rPr lang="it-IT"/>
               <a:t>Quarto livello</a:t>
             </a:r>
           </a:p>
           <a:p>
             <a:pPr lvl="4"/>
             <a:r>
-              <a:rPr lang="it-IT" smtClean="0"/>
+              <a:rPr lang="it-IT"/>
               <a:t>Quinto livello</a:t>
             </a:r>
           </a:p>
@@ -8066,13 +7885,6 @@
     <p:sldLayoutId id="2147484753" r:id="rId10"/>
     <p:sldLayoutId id="2147484754" r:id="rId11"/>
   </p:sldLayoutIdLst>
-  <p:timing>
-    <p:tnLst>
-      <p:par>
-        <p:cTn id="1" dur="indefinite" restart="never" nodeType="tmRoot"/>
-      </p:par>
-    </p:tnLst>
-  </p:timing>
   <p:hf hdr="0" dt="0"/>
   <p:txStyles>
     <p:titleStyle>
@@ -8497,10 +8309,10 @@
               <a:defRPr/>
             </a:pPr>
             <a:r>
-              <a:rPr lang="it-IT" sz="4400" dirty="0" smtClean="0"/>
+              <a:rPr lang="it-IT" sz="4400" dirty="0"/>
               <a:t>Valutazione del consumo energetico di Large Language Model in dispositivi dell’Internet delle Cose</a:t>
             </a:r>
-            <a:endParaRPr lang="it-IT" sz="2400" dirty="0" smtClean="0">
+            <a:endParaRPr lang="it-IT" sz="2400" dirty="0">
               <a:latin typeface="+mj-lt"/>
             </a:endParaRPr>
           </a:p>
@@ -8563,7 +8375,7 @@
                 <a:spcPct val="90000"/>
               </a:lnSpc>
             </a:pPr>
-            <a:endParaRPr lang="en-US" altLang="it-IT" sz="2800" b="1" dirty="0" smtClean="0">
+            <a:endParaRPr lang="en-US" altLang="it-IT" sz="2800" b="1" dirty="0">
               <a:latin typeface="Calibri" panose="020F0502020204030204" pitchFamily="34" charset="0"/>
             </a:endParaRPr>
           </a:p>
@@ -8583,7 +8395,7 @@
                 <a:spcPct val="90000"/>
               </a:lnSpc>
             </a:pPr>
-            <a:endParaRPr lang="en-US" altLang="it-IT" sz="2800" b="1" dirty="0" smtClean="0">
+            <a:endParaRPr lang="en-US" altLang="it-IT" sz="2800" b="1" dirty="0">
               <a:latin typeface="Calibri" panose="020F0502020204030204" pitchFamily="34" charset="0"/>
             </a:endParaRPr>
           </a:p>
@@ -8603,7 +8415,7 @@
                 <a:spcPct val="90000"/>
               </a:lnSpc>
             </a:pPr>
-            <a:endParaRPr lang="en-US" altLang="it-IT" sz="2800" b="1" dirty="0" smtClean="0">
+            <a:endParaRPr lang="en-US" altLang="it-IT" sz="2800" b="1" dirty="0">
               <a:latin typeface="Calibri" panose="020F0502020204030204" pitchFamily="34" charset="0"/>
             </a:endParaRPr>
           </a:p>
@@ -8623,7 +8435,7 @@
                 <a:spcPct val="90000"/>
               </a:lnSpc>
             </a:pPr>
-            <a:endParaRPr lang="en-US" altLang="it-IT" sz="2800" b="1" dirty="0" smtClean="0">
+            <a:endParaRPr lang="en-US" altLang="it-IT" sz="2800" b="1" dirty="0">
               <a:latin typeface="Calibri" panose="020F0502020204030204" pitchFamily="34" charset="0"/>
             </a:endParaRPr>
           </a:p>
@@ -8643,7 +8455,7 @@
                 <a:spcPct val="90000"/>
               </a:lnSpc>
             </a:pPr>
-            <a:endParaRPr lang="en-US" altLang="it-IT" sz="2800" b="1" dirty="0" smtClean="0">
+            <a:endParaRPr lang="en-US" altLang="it-IT" sz="2800" b="1" dirty="0">
               <a:latin typeface="Calibri" panose="020F0502020204030204" pitchFamily="34" charset="0"/>
             </a:endParaRPr>
           </a:p>
@@ -8671,7 +8483,7 @@
                 <a:spcPct val="90000"/>
               </a:lnSpc>
             </a:pPr>
-            <a:endParaRPr lang="en-US" altLang="it-IT" sz="1800" dirty="0" smtClean="0"/>
+            <a:endParaRPr lang="en-US" altLang="it-IT" sz="1800" dirty="0"/>
           </a:p>
           <a:p>
             <a:pPr algn="ctr">
@@ -8679,7 +8491,7 @@
                 <a:spcPct val="90000"/>
               </a:lnSpc>
             </a:pPr>
-            <a:endParaRPr lang="en-US" altLang="it-IT" sz="1600" dirty="0" smtClean="0"/>
+            <a:endParaRPr lang="en-US" altLang="it-IT" sz="1600" dirty="0"/>
           </a:p>
           <a:p>
             <a:pPr algn="ctr">
@@ -8687,7 +8499,7 @@
                 <a:spcPct val="90000"/>
               </a:lnSpc>
             </a:pPr>
-            <a:endParaRPr lang="en-US" altLang="it-IT" sz="1600" dirty="0" smtClean="0"/>
+            <a:endParaRPr lang="en-US" altLang="it-IT" sz="1600" dirty="0"/>
           </a:p>
           <a:p>
             <a:pPr algn="ctr">
@@ -8695,7 +8507,7 @@
                 <a:spcPct val="90000"/>
               </a:lnSpc>
             </a:pPr>
-            <a:endParaRPr lang="en-US" altLang="it-IT" sz="1600" dirty="0" smtClean="0"/>
+            <a:endParaRPr lang="en-US" altLang="it-IT" sz="1600" dirty="0"/>
           </a:p>
           <a:p>
             <a:pPr algn="ctr">
@@ -8703,7 +8515,7 @@
                 <a:spcPct val="90000"/>
               </a:lnSpc>
             </a:pPr>
-            <a:endParaRPr lang="en-US" altLang="it-IT" sz="1600" dirty="0" smtClean="0"/>
+            <a:endParaRPr lang="en-US" altLang="it-IT" sz="1600" dirty="0"/>
           </a:p>
         </p:txBody>
       </p:sp>
@@ -8730,7 +8542,7 @@
           <a:lstStyle/>
           <a:p>
             <a:r>
-              <a:rPr lang="it-IT" sz="3600" dirty="0" smtClean="0">
+              <a:rPr lang="it-IT" sz="3600" dirty="0">
                 <a:solidFill>
                   <a:srgbClr val="003366"/>
                 </a:solidFill>
@@ -8742,7 +8554,7 @@
           </a:p>
           <a:p>
             <a:r>
-              <a:rPr lang="it-IT" dirty="0" smtClean="0">
+              <a:rPr lang="it-IT" dirty="0">
                 <a:solidFill>
                   <a:srgbClr val="003366"/>
                 </a:solidFill>
@@ -8778,7 +8590,7 @@
           <a:p>
             <a:pPr algn="just"/>
             <a:r>
-              <a:rPr lang="it-IT" sz="2000" b="1" dirty="0" smtClean="0">
+              <a:rPr lang="it-IT" sz="2000" b="1" dirty="0">
                 <a:solidFill>
                   <a:srgbClr val="003366"/>
                 </a:solidFill>
@@ -8790,7 +8602,7 @@
           <a:p>
             <a:pPr marL="87313" algn="just"/>
             <a:r>
-              <a:rPr lang="it-IT" sz="2000" dirty="0" smtClean="0">
+              <a:rPr lang="it-IT" sz="2000" dirty="0">
                 <a:solidFill>
                   <a:srgbClr val="003366"/>
                 </a:solidFill>
@@ -8798,7 +8610,7 @@
               </a:rPr>
               <a:t>Dario Guidi</a:t>
             </a:r>
-            <a:endParaRPr lang="it-IT" sz="2800" dirty="0" smtClean="0">
+            <a:endParaRPr lang="it-IT" sz="2800" dirty="0">
               <a:solidFill>
                 <a:srgbClr val="003366"/>
               </a:solidFill>
@@ -8831,7 +8643,7 @@
           <a:p>
             <a:pPr algn="just"/>
             <a:r>
-              <a:rPr lang="it-IT" sz="2000" b="1" dirty="0" smtClean="0">
+              <a:rPr lang="it-IT" sz="2000" b="1" dirty="0">
                 <a:solidFill>
                   <a:srgbClr val="003366"/>
                 </a:solidFill>
@@ -8843,7 +8655,7 @@
           <a:p>
             <a:pPr marL="87313" algn="just"/>
             <a:r>
-              <a:rPr lang="it-IT" sz="2000" dirty="0" smtClean="0">
+              <a:rPr lang="it-IT" sz="2000" dirty="0">
                 <a:solidFill>
                   <a:srgbClr val="003366"/>
                 </a:solidFill>
@@ -8854,34 +8666,22 @@
           </a:p>
           <a:p>
             <a:pPr marL="87313" algn="just"/>
-            <a:r>
-              <a:rPr lang="it-IT" sz="2000" dirty="0" smtClean="0">
-                <a:solidFill>
-                  <a:srgbClr val="003366"/>
-                </a:solidFill>
-                <a:latin typeface="Calibri" panose="020F0502020204030204" pitchFamily="34" charset="0"/>
-              </a:rPr>
-              <a:t/>
-            </a:r>
-          </a:p>
-          <a:p>
-            <a:pPr marL="87313" algn="just"/>
-            <a:r>
-              <a:rPr lang="it-IT" sz="2000" dirty="0" smtClean="0">
-                <a:solidFill>
-                  <a:srgbClr val="003366"/>
-                </a:solidFill>
-                <a:latin typeface="Calibri" panose="020F0502020204030204" pitchFamily="34" charset="0"/>
-              </a:rPr>
-              <a:t/>
-            </a:r>
-            <a:endParaRPr lang="it-IT" sz="2800" dirty="0" smtClean="0">
+            <a:endParaRPr lang="it-IT" sz="2000" dirty="0">
               <a:solidFill>
                 <a:srgbClr val="003366"/>
               </a:solidFill>
               <a:latin typeface="Calibri" panose="020F0502020204030204" pitchFamily="34" charset="0"/>
             </a:endParaRPr>
           </a:p>
+          <a:p>
+            <a:pPr marL="87313" algn="just"/>
+            <a:endParaRPr lang="it-IT" sz="2800" dirty="0">
+              <a:solidFill>
+                <a:srgbClr val="003366"/>
+              </a:solidFill>
+              <a:latin typeface="Calibri" panose="020F0502020204030204" pitchFamily="34" charset="0"/>
+            </a:endParaRPr>
+          </a:p>
         </p:txBody>
       </p:sp>
     </p:spTree>
@@ -8889,13 +8689,6 @@
   <p:clrMapOvr>
     <a:masterClrMapping/>
   </p:clrMapOvr>
-  <p:timing>
-    <p:tnLst>
-      <p:par>
-        <p:cTn id="1" dur="indefinite" restart="never" nodeType="tmRoot"/>
-      </p:par>
-    </p:tnLst>
-  </p:timing>
 </p:sld>
 </file>
 
@@ -8940,10 +8733,9 @@
           <a:lstStyle/>
           <a:p>
             <a:r>
-              <a:rPr lang="it-IT" dirty="0" smtClean="0"/>
+              <a:rPr lang="it-IT" dirty="0"/>
               <a:t>Introduzione e Problema</a:t>
             </a:r>
-            <a:endParaRPr lang="it-IT" dirty="0"/>
           </a:p>
         </p:txBody>
       </p:sp>
@@ -8968,25 +8760,25 @@
           <a:lstStyle/>
           <a:p>
             <a:r>
-              <a:rPr lang="it-IT" dirty="0" smtClean="0"/>
+              <a:rPr lang="it-IT" dirty="0"/>
               <a:t>I Large Language Model si stanno diffondendo rapidamente, ma comportano consumi energetici elevati. Eseguirli localmente su dispositivi edge/IoT, grazie alla quantizzazione, è una via verso un’IA più sostenibile (Green Edge AI).</a:t>
             </a:r>
           </a:p>
           <a:p>
             <a:r>
-              <a:rPr lang="it-IT" dirty="0" smtClean="0"/>
+              <a:rPr lang="it-IT" dirty="0"/>
               <a:t>Problema</a:t>
             </a:r>
           </a:p>
           <a:p>
             <a:pPr lvl="1"/>
             <a:r>
-              <a:rPr lang="it-IT" dirty="0" smtClean="0"/>
+              <a:rPr lang="it-IT" dirty="0"/>
               <a:t>Un dispositivo a risorse limitate come il Raspberry Pi 5 può eseguire LLM quantizzati in modo efficiente? E con quale compromesso tra consumo energetico, qualità delle risposte e latenza?</a:t>
             </a:r>
           </a:p>
           <a:p>
-            <a:endParaRPr lang="it-IT" dirty="0" smtClean="0"/>
+            <a:endParaRPr lang="it-IT" dirty="0"/>
           </a:p>
           <a:p>
             <a:endParaRPr lang="it-IT" dirty="0"/>
@@ -9023,40 +8815,16 @@
           <a:p>
             <a:pPr algn="l"/>
             <a:r>
-              <a:rPr lang="en-US" sz="1100" i="1" dirty="0" smtClean="0">
+              <a:rPr lang="en-US" sz="1100" i="1" dirty="0">
                 <a:latin typeface="Calibri" panose="020F0502020204030204" pitchFamily="34" charset="0"/>
               </a:rPr>
               <a:t>Dario Guidi</a:t>
             </a:r>
             <a:r>
-              <a:rPr lang="en-US" sz="1100" i="1" dirty="0" err="1" smtClean="0">
-                <a:latin typeface="Calibri" panose="020F0502020204030204" pitchFamily="34" charset="0"/>
-              </a:rPr>
-              <a:t/>
-            </a:r>
-            <a:r>
-              <a:rPr lang="en-US" sz="1100" i="1" dirty="0" smtClean="0">
-                <a:latin typeface="Calibri" panose="020F0502020204030204" pitchFamily="34" charset="0"/>
-              </a:rPr>
-              <a:t/>
-            </a:r>
-            <a:r>
-              <a:rPr lang="en-US" sz="1100" i="1" dirty="0" err="1" smtClean="0">
-                <a:latin typeface="Calibri" panose="020F0502020204030204" pitchFamily="34" charset="0"/>
-              </a:rPr>
-              <a:t/>
-            </a:r>
-            <a:r>
               <a:rPr lang="en-US" sz="1100" dirty="0">
                 <a:latin typeface="Calibri" panose="020F0502020204030204" pitchFamily="34" charset="0"/>
               </a:rPr>
-              <a:t>						</a:t>
-            </a:r>
-            <a:r>
-              <a:rPr lang="en-US" sz="1100" dirty="0" smtClean="0">
-                <a:latin typeface="Calibri" panose="020F0502020204030204" pitchFamily="34" charset="0"/>
-              </a:rPr>
-              <a:t>		</a:t>
+              <a:t>								</a:t>
             </a:r>
             <a:fld id="{9EA84853-51C7-4A16-B21A-2D25E6B14CA2}" type="slidenum">
               <a:rPr lang="en-US" sz="1100" smtClean="0">
@@ -9080,13 +8848,6 @@
   <p:clrMapOvr>
     <a:masterClrMapping/>
   </p:clrMapOvr>
-  <p:timing>
-    <p:tnLst>
-      <p:par>
-        <p:cTn id="1" dur="indefinite" restart="never" nodeType="tmRoot"/>
-      </p:par>
-    </p:tnLst>
-  </p:timing>
 </p:sld>
 </file>
 
@@ -9123,10 +8884,9 @@
           <a:lstStyle/>
           <a:p>
             <a:r>
-              <a:rPr lang="it-IT" dirty="0" smtClean="0"/>
+              <a:rPr lang="it-IT" dirty="0"/>
               <a:t>Procedura sperimentale</a:t>
             </a:r>
-            <a:endParaRPr lang="it-IT" dirty="0"/>
           </a:p>
         </p:txBody>
       </p:sp>
@@ -9146,56 +8906,55 @@
           <a:lstStyle/>
           <a:p>
             <a:r>
-              <a:rPr lang="it-IT" dirty="0" smtClean="0"/>
+              <a:rPr lang="it-IT" dirty="0"/>
               <a:t>6 modelli quantizzati</a:t>
             </a:r>
           </a:p>
           <a:p>
             <a:pPr lvl="1"/>
             <a:r>
-              <a:rPr lang="it-IT" dirty="0" smtClean="0"/>
+              <a:rPr lang="it-IT" dirty="0"/>
               <a:t>qwen 1.5B, gemma 2B, Llama 3B — a 4 e 8 bit — eseguiti con llama.cpp</a:t>
             </a:r>
           </a:p>
           <a:p>
             <a:r>
-              <a:rPr lang="it-IT" dirty="0" smtClean="0"/>
+              <a:rPr lang="it-IT" dirty="0"/>
               <a:t>Consumo misurato dal PMIC</a:t>
             </a:r>
           </a:p>
           <a:p>
             <a:pPr lvl="1"/>
             <a:r>
-              <a:rPr lang="it-IT" dirty="0" smtClean="0"/>
+              <a:rPr lang="it-IT" dirty="0"/>
               <a:t>potenza letta dai 12 rami interni del Raspberry Pi 5, senza strumenti esterni</a:t>
             </a:r>
           </a:p>
           <a:p>
             <a:r>
-              <a:rPr lang="it-IT" dirty="0" smtClean="0"/>
+              <a:rPr lang="it-IT" dirty="0"/>
               <a:t>5 benchmark</a:t>
             </a:r>
           </a:p>
           <a:p>
             <a:pPr lvl="1"/>
             <a:r>
-              <a:rPr lang="it-IT" dirty="0" smtClean="0"/>
+              <a:rPr lang="it-IT" dirty="0"/>
               <a:t>CommonsenseQA, BIG-Bench Hard, TruthfulQA, GSM8K, HumanEval: energia, qualità e latenza</a:t>
             </a:r>
           </a:p>
           <a:p>
             <a:r>
-              <a:rPr lang="it-IT" dirty="0" smtClean="0"/>
+              <a:rPr lang="it-IT" dirty="0"/>
               <a:t>Due campagne di misura</a:t>
             </a:r>
           </a:p>
           <a:p>
             <a:pPr lvl="1"/>
             <a:r>
-              <a:rPr lang="it-IT" dirty="0" smtClean="0"/>
+              <a:rPr lang="it-IT" dirty="0"/>
               <a:t>A: confronto tra i modelli (2 thread); B: effetto del parallelismo (1, 2, 4 thread)</a:t>
             </a:r>
-            <a:endParaRPr lang="it-IT" dirty="0"/>
           </a:p>
         </p:txBody>
       </p:sp>
@@ -9229,40 +8988,16 @@
           <a:p>
             <a:pPr algn="l"/>
             <a:r>
-              <a:rPr lang="en-US" sz="1100" i="1" dirty="0" smtClean="0">
+              <a:rPr lang="en-US" sz="1100" i="1" dirty="0">
                 <a:latin typeface="Calibri" panose="020F0502020204030204" pitchFamily="34" charset="0"/>
               </a:rPr>
               <a:t>Dario Guidi</a:t>
             </a:r>
             <a:r>
-              <a:rPr lang="en-US" sz="1100" i="1" dirty="0" err="1" smtClean="0">
-                <a:latin typeface="Calibri" panose="020F0502020204030204" pitchFamily="34" charset="0"/>
-              </a:rPr>
-              <a:t/>
-            </a:r>
-            <a:r>
-              <a:rPr lang="en-US" sz="1100" i="1" smtClean="0">
-                <a:latin typeface="Calibri" panose="020F0502020204030204" pitchFamily="34" charset="0"/>
-              </a:rPr>
-              <a:t/>
-            </a:r>
-            <a:r>
-              <a:rPr lang="en-US" sz="1100" i="1" smtClean="0">
-                <a:latin typeface="Calibri" panose="020F0502020204030204" pitchFamily="34" charset="0"/>
-              </a:rPr>
-              <a:t/>
-            </a:r>
-            <a:r>
               <a:rPr lang="en-US" sz="1100" dirty="0">
                 <a:latin typeface="Calibri" panose="020F0502020204030204" pitchFamily="34" charset="0"/>
               </a:rPr>
-              <a:t>						</a:t>
-            </a:r>
-            <a:r>
-              <a:rPr lang="en-US" sz="1100" dirty="0" smtClean="0">
-                <a:latin typeface="Calibri" panose="020F0502020204030204" pitchFamily="34" charset="0"/>
-              </a:rPr>
-              <a:t>		</a:t>
+              <a:t>								</a:t>
             </a:r>
             <a:fld id="{9EA84853-51C7-4A16-B21A-2D25E6B14CA2}" type="slidenum">
               <a:rPr lang="en-US" sz="1100" smtClean="0">
@@ -9286,13 +9021,6 @@
   <p:clrMapOvr>
     <a:masterClrMapping/>
   </p:clrMapOvr>
-  <p:timing>
-    <p:tnLst>
-      <p:par>
-        <p:cTn id="1" dur="indefinite" restart="never" nodeType="tmRoot"/>
-      </p:par>
-    </p:tnLst>
-  </p:timing>
 </p:sld>
 </file>
 
@@ -9329,10 +9057,9 @@
           <a:lstStyle/>
           <a:p>
             <a:r>
-              <a:rPr lang="it-IT" dirty="0" smtClean="0"/>
+              <a:rPr lang="it-IT" dirty="0"/>
               <a:t>Risultati e conclusioni</a:t>
             </a:r>
-            <a:endParaRPr lang="it-IT" dirty="0"/>
           </a:p>
         </p:txBody>
       </p:sp>
@@ -9352,73 +9079,72 @@
           <a:lstStyle/>
           <a:p>
             <a:r>
-              <a:rPr lang="it-IT" dirty="0" smtClean="0"/>
+              <a:rPr lang="it-IT" dirty="0"/>
               <a:t>Sintesi dei risultati</a:t>
             </a:r>
           </a:p>
           <a:p>
             <a:pPr lvl="1"/>
             <a:r>
-              <a:rPr lang="it-IT" dirty="0" smtClean="0"/>
+              <a:rPr lang="it-IT" dirty="0"/>
               <a:t>Miglior configurazione</a:t>
             </a:r>
           </a:p>
           <a:p>
             <a:pPr lvl="2"/>
             <a:r>
-              <a:rPr lang="it-IT" dirty="0" smtClean="0"/>
+              <a:rPr lang="it-IT" dirty="0"/>
               <a:t>qwen2.5-1.5B a 4 bit, 2 thread: miglior compromesso energia–qualità–latenza</a:t>
             </a:r>
           </a:p>
           <a:p>
             <a:pPr lvl="1"/>
             <a:r>
-              <a:rPr lang="it-IT" dirty="0" smtClean="0"/>
+              <a:rPr lang="it-IT" dirty="0"/>
               <a:t>Quantizzazione a 4 bit conveniente</a:t>
             </a:r>
           </a:p>
           <a:p>
             <a:pPr lvl="2"/>
             <a:r>
-              <a:rPr lang="it-IT" dirty="0" smtClean="0"/>
+              <a:rPr lang="it-IT" dirty="0"/>
               <a:t>qualità equivalente agli 8 bit, ma circa il 18% di energia in meno e minore latenza</a:t>
             </a:r>
           </a:p>
           <a:p>
             <a:pPr lvl="1"/>
             <a:r>
-              <a:rPr lang="it-IT" dirty="0" smtClean="0"/>
+              <a:rPr lang="it-IT" dirty="0"/>
               <a:t>Parallelismo: 2 thread ottimali</a:t>
             </a:r>
           </a:p>
           <a:p>
             <a:pPr lvl="2"/>
             <a:r>
-              <a:rPr lang="it-IT" dirty="0" smtClean="0"/>
+              <a:rPr lang="it-IT" dirty="0"/>
               <a:t>oltre i 2 thread non si guadagna (collo di bottiglia: la banda di memoria)</a:t>
             </a:r>
           </a:p>
           <a:p>
             <a:pPr lvl="1"/>
             <a:r>
-              <a:rPr lang="it-IT" dirty="0" smtClean="0"/>
-              <a:t>Raspberry Pi 5 adeguato</a:t>
+              <a:rPr lang="it-IT" dirty="0"/>
+              <a:t>Raspberry Pi 5 adeguato (8 GB di RAM)</a:t>
             </a:r>
           </a:p>
           <a:p>
             <a:pPr lvl="2"/>
             <a:r>
-              <a:rPr lang="it-IT" dirty="0" smtClean="0"/>
+              <a:rPr lang="it-IT" dirty="0"/>
               <a:t>esegue LLM fino a ~3 miliardi di parametri quantizzati</a:t>
             </a:r>
           </a:p>
           <a:p>
             <a:pPr lvl="2"/>
             <a:r>
-              <a:rPr lang="it-IT" dirty="0" smtClean="0"/>
+              <a:rPr lang="it-IT" dirty="0"/>
               <a:t>senza incorrere in throttling termico</a:t>
             </a:r>
-            <a:endParaRPr lang="it-IT" dirty="0"/>
           </a:p>
         </p:txBody>
       </p:sp>
@@ -9452,40 +9178,16 @@
           <a:p>
             <a:pPr algn="l"/>
             <a:r>
-              <a:rPr lang="en-US" sz="1100" i="1" dirty="0" smtClean="0">
+              <a:rPr lang="en-US" sz="1100" i="1" dirty="0">
                 <a:latin typeface="Calibri" panose="020F0502020204030204" pitchFamily="34" charset="0"/>
               </a:rPr>
               <a:t>Dario Guidi</a:t>
             </a:r>
             <a:r>
-              <a:rPr lang="en-US" sz="1100" i="1" dirty="0" err="1" smtClean="0">
-                <a:latin typeface="Calibri" panose="020F0502020204030204" pitchFamily="34" charset="0"/>
-              </a:rPr>
-              <a:t/>
-            </a:r>
-            <a:r>
-              <a:rPr lang="en-US" sz="1100" i="1" dirty="0" smtClean="0">
-                <a:latin typeface="Calibri" panose="020F0502020204030204" pitchFamily="34" charset="0"/>
-              </a:rPr>
-              <a:t/>
-            </a:r>
-            <a:r>
-              <a:rPr lang="en-US" sz="1100" i="1" dirty="0" err="1" smtClean="0">
-                <a:latin typeface="Calibri" panose="020F0502020204030204" pitchFamily="34" charset="0"/>
-              </a:rPr>
-              <a:t/>
-            </a:r>
-            <a:r>
               <a:rPr lang="en-US" sz="1100" dirty="0">
                 <a:latin typeface="Calibri" panose="020F0502020204030204" pitchFamily="34" charset="0"/>
               </a:rPr>
-              <a:t>						</a:t>
-            </a:r>
-            <a:r>
-              <a:rPr lang="en-US" sz="1100" dirty="0" smtClean="0">
-                <a:latin typeface="Calibri" panose="020F0502020204030204" pitchFamily="34" charset="0"/>
-              </a:rPr>
-              <a:t>		</a:t>
+              <a:t>								</a:t>
             </a:r>
             <a:fld id="{9EA84853-51C7-4A16-B21A-2D25E6B14CA2}" type="slidenum">
               <a:rPr lang="en-US" sz="1100" smtClean="0">
@@ -9509,13 +9211,6 @@
   <p:clrMapOvr>
     <a:masterClrMapping/>
   </p:clrMapOvr>
-  <p:timing>
-    <p:tnLst>
-      <p:par>
-        <p:cTn id="1" dur="indefinite" restart="never" nodeType="tmRoot"/>
-      </p:par>
-    </p:tnLst>
-  </p:timing>
 </p:sld>
 </file>
 
